--- a/tests/testthat/temp_fullslide_43.pptx
+++ b/tests/testthat/temp_fullslide_43.pptx
@@ -2610,8 +2610,8 @@
           </p:nvSpPr>
           <p:spPr>
             <a:xfrm>
-              <a:off x="1061087" y="1441338"/>
-              <a:ext cx="7499913" cy="4536564"/>
+              <a:off x="1065110" y="1441338"/>
+              <a:ext cx="7495890" cy="4538850"/>
             </a:xfrm>
             <a:prstGeom prst="rect">
               <a:avLst/>
@@ -2636,21 +2636,21 @@
           </p:nvSpPr>
           <p:spPr>
             <a:xfrm>
-              <a:off x="1061087" y="5403154"/>
-              <a:ext cx="7499913" cy="0"/>
+              <a:off x="1065110" y="5405150"/>
+              <a:ext cx="7495890" cy="0"/>
             </a:xfrm>
             <a:custGeom>
               <a:avLst/>
               <a:pathLst>
-                <a:path w="7499913" h="0">
+                <a:path w="7495890" h="0">
                   <a:moveTo>
                     <a:pt x="0" y="0"/>
                   </a:moveTo>
                   <a:lnTo>
-                    <a:pt x="7499913" y="0"/>
+                    <a:pt x="7495890" y="0"/>
                   </a:lnTo>
                   <a:lnTo>
-                    <a:pt x="7499913" y="0"/>
+                    <a:pt x="7495890" y="0"/>
                   </a:lnTo>
                 </a:path>
               </a:pathLst>
@@ -2679,21 +2679,21 @@
           </p:nvSpPr>
           <p:spPr>
             <a:xfrm>
-              <a:off x="1061087" y="4525675"/>
-              <a:ext cx="7499913" cy="0"/>
+              <a:off x="1065110" y="4527229"/>
+              <a:ext cx="7495890" cy="0"/>
             </a:xfrm>
             <a:custGeom>
               <a:avLst/>
               <a:pathLst>
-                <a:path w="7499913" h="0">
+                <a:path w="7495890" h="0">
                   <a:moveTo>
                     <a:pt x="0" y="0"/>
                   </a:moveTo>
                   <a:lnTo>
-                    <a:pt x="7499913" y="0"/>
+                    <a:pt x="7495890" y="0"/>
                   </a:lnTo>
                   <a:lnTo>
-                    <a:pt x="7499913" y="0"/>
+                    <a:pt x="7495890" y="0"/>
                   </a:lnTo>
                 </a:path>
               </a:pathLst>
@@ -2722,21 +2722,21 @@
           </p:nvSpPr>
           <p:spPr>
             <a:xfrm>
-              <a:off x="1061087" y="3648196"/>
-              <a:ext cx="7499913" cy="0"/>
+              <a:off x="1065110" y="3649308"/>
+              <a:ext cx="7495890" cy="0"/>
             </a:xfrm>
             <a:custGeom>
               <a:avLst/>
               <a:pathLst>
-                <a:path w="7499913" h="0">
+                <a:path w="7495890" h="0">
                   <a:moveTo>
                     <a:pt x="0" y="0"/>
                   </a:moveTo>
                   <a:lnTo>
-                    <a:pt x="7499913" y="0"/>
+                    <a:pt x="7495890" y="0"/>
                   </a:lnTo>
                   <a:lnTo>
-                    <a:pt x="7499913" y="0"/>
+                    <a:pt x="7495890" y="0"/>
                   </a:lnTo>
                 </a:path>
               </a:pathLst>
@@ -2765,21 +2765,21 @@
           </p:nvSpPr>
           <p:spPr>
             <a:xfrm>
-              <a:off x="1061087" y="2770718"/>
-              <a:ext cx="7499913" cy="0"/>
+              <a:off x="1065110" y="2771388"/>
+              <a:ext cx="7495890" cy="0"/>
             </a:xfrm>
             <a:custGeom>
               <a:avLst/>
               <a:pathLst>
-                <a:path w="7499913" h="0">
+                <a:path w="7495890" h="0">
                   <a:moveTo>
                     <a:pt x="0" y="0"/>
                   </a:moveTo>
                   <a:lnTo>
-                    <a:pt x="7499913" y="0"/>
+                    <a:pt x="7495890" y="0"/>
                   </a:lnTo>
                   <a:lnTo>
-                    <a:pt x="7499913" y="0"/>
+                    <a:pt x="7495890" y="0"/>
                   </a:lnTo>
                 </a:path>
               </a:pathLst>
@@ -2808,21 +2808,21 @@
           </p:nvSpPr>
           <p:spPr>
             <a:xfrm>
-              <a:off x="1061087" y="1893239"/>
-              <a:ext cx="7499913" cy="0"/>
+              <a:off x="1065110" y="1893467"/>
+              <a:ext cx="7495890" cy="0"/>
             </a:xfrm>
             <a:custGeom>
               <a:avLst/>
               <a:pathLst>
-                <a:path w="7499913" h="0">
+                <a:path w="7495890" h="0">
                   <a:moveTo>
                     <a:pt x="0" y="0"/>
                   </a:moveTo>
                   <a:lnTo>
-                    <a:pt x="7499913" y="0"/>
+                    <a:pt x="7495890" y="0"/>
                   </a:lnTo>
                   <a:lnTo>
-                    <a:pt x="7499913" y="0"/>
+                    <a:pt x="7495890" y="0"/>
                   </a:lnTo>
                 </a:path>
               </a:pathLst>
@@ -2851,15 +2851,15 @@
           </p:nvSpPr>
           <p:spPr>
             <a:xfrm>
-              <a:off x="1379329" y="1441338"/>
-              <a:ext cx="0" cy="4536564"/>
+              <a:off x="1383181" y="1441338"/>
+              <a:ext cx="0" cy="4538850"/>
             </a:xfrm>
             <a:custGeom>
               <a:avLst/>
               <a:pathLst>
-                <a:path w="0" h="4536564">
+                <a:path w="0" h="4538850">
                   <a:moveTo>
-                    <a:pt x="0" y="4536564"/>
+                    <a:pt x="0" y="4538850"/>
                   </a:moveTo>
                   <a:lnTo>
                     <a:pt x="0" y="0"/>
@@ -2894,15 +2894,15 @@
           </p:nvSpPr>
           <p:spPr>
             <a:xfrm>
-              <a:off x="3122643" y="1441338"/>
-              <a:ext cx="0" cy="4536564"/>
+              <a:off x="3125561" y="1441338"/>
+              <a:ext cx="0" cy="4538850"/>
             </a:xfrm>
             <a:custGeom>
               <a:avLst/>
               <a:pathLst>
-                <a:path w="0" h="4536564">
+                <a:path w="0" h="4538850">
                   <a:moveTo>
-                    <a:pt x="0" y="4536564"/>
+                    <a:pt x="0" y="4538850"/>
                   </a:moveTo>
                   <a:lnTo>
                     <a:pt x="0" y="0"/>
@@ -2937,15 +2937,15 @@
           </p:nvSpPr>
           <p:spPr>
             <a:xfrm>
-              <a:off x="4865958" y="1441338"/>
-              <a:ext cx="0" cy="4536564"/>
+              <a:off x="4867940" y="1441338"/>
+              <a:ext cx="0" cy="4538850"/>
             </a:xfrm>
             <a:custGeom>
               <a:avLst/>
               <a:pathLst>
-                <a:path w="0" h="4536564">
+                <a:path w="0" h="4538850">
                   <a:moveTo>
-                    <a:pt x="0" y="4536564"/>
+                    <a:pt x="0" y="4538850"/>
                   </a:moveTo>
                   <a:lnTo>
                     <a:pt x="0" y="0"/>
@@ -2980,15 +2980,15 @@
           </p:nvSpPr>
           <p:spPr>
             <a:xfrm>
-              <a:off x="6609273" y="1441338"/>
-              <a:ext cx="0" cy="4536564"/>
+              <a:off x="6610320" y="1441338"/>
+              <a:ext cx="0" cy="4538850"/>
             </a:xfrm>
             <a:custGeom>
               <a:avLst/>
               <a:pathLst>
-                <a:path w="0" h="4536564">
+                <a:path w="0" h="4538850">
                   <a:moveTo>
-                    <a:pt x="0" y="4536564"/>
+                    <a:pt x="0" y="4538850"/>
                   </a:moveTo>
                   <a:lnTo>
                     <a:pt x="0" y="0"/>
@@ -3023,15 +3023,15 @@
           </p:nvSpPr>
           <p:spPr>
             <a:xfrm>
-              <a:off x="8352587" y="1441338"/>
-              <a:ext cx="0" cy="4536564"/>
+              <a:off x="8352699" y="1441338"/>
+              <a:ext cx="0" cy="4538850"/>
             </a:xfrm>
             <a:custGeom>
               <a:avLst/>
               <a:pathLst>
-                <a:path w="0" h="4536564">
+                <a:path w="0" h="4538850">
                   <a:moveTo>
-                    <a:pt x="0" y="4536564"/>
+                    <a:pt x="0" y="4538850"/>
                   </a:moveTo>
                   <a:lnTo>
                     <a:pt x="0" y="0"/>
@@ -3066,21 +3066,21 @@
           </p:nvSpPr>
           <p:spPr>
             <a:xfrm>
-              <a:off x="1061087" y="5841893"/>
-              <a:ext cx="7499913" cy="0"/>
+              <a:off x="1065110" y="5844110"/>
+              <a:ext cx="7495890" cy="0"/>
             </a:xfrm>
             <a:custGeom>
               <a:avLst/>
               <a:pathLst>
-                <a:path w="7499913" h="0">
+                <a:path w="7495890" h="0">
                   <a:moveTo>
                     <a:pt x="0" y="0"/>
                   </a:moveTo>
                   <a:lnTo>
-                    <a:pt x="7499913" y="0"/>
+                    <a:pt x="7495890" y="0"/>
                   </a:lnTo>
                   <a:lnTo>
-                    <a:pt x="7499913" y="0"/>
+                    <a:pt x="7495890" y="0"/>
                   </a:lnTo>
                 </a:path>
               </a:pathLst>
@@ -3109,21 +3109,21 @@
           </p:nvSpPr>
           <p:spPr>
             <a:xfrm>
-              <a:off x="1061087" y="4964414"/>
-              <a:ext cx="7499913" cy="0"/>
+              <a:off x="1065110" y="4966190"/>
+              <a:ext cx="7495890" cy="0"/>
             </a:xfrm>
             <a:custGeom>
               <a:avLst/>
               <a:pathLst>
-                <a:path w="7499913" h="0">
+                <a:path w="7495890" h="0">
                   <a:moveTo>
                     <a:pt x="0" y="0"/>
                   </a:moveTo>
                   <a:lnTo>
-                    <a:pt x="7499913" y="0"/>
+                    <a:pt x="7495890" y="0"/>
                   </a:lnTo>
                   <a:lnTo>
-                    <a:pt x="7499913" y="0"/>
+                    <a:pt x="7495890" y="0"/>
                   </a:lnTo>
                 </a:path>
               </a:pathLst>
@@ -3152,21 +3152,21 @@
           </p:nvSpPr>
           <p:spPr>
             <a:xfrm>
-              <a:off x="1061087" y="4086936"/>
-              <a:ext cx="7499913" cy="0"/>
+              <a:off x="1065110" y="4088269"/>
+              <a:ext cx="7495890" cy="0"/>
             </a:xfrm>
             <a:custGeom>
               <a:avLst/>
               <a:pathLst>
-                <a:path w="7499913" h="0">
+                <a:path w="7495890" h="0">
                   <a:moveTo>
                     <a:pt x="0" y="0"/>
                   </a:moveTo>
                   <a:lnTo>
-                    <a:pt x="7499913" y="0"/>
+                    <a:pt x="7495890" y="0"/>
                   </a:lnTo>
                   <a:lnTo>
-                    <a:pt x="7499913" y="0"/>
+                    <a:pt x="7495890" y="0"/>
                   </a:lnTo>
                 </a:path>
               </a:pathLst>
@@ -3195,21 +3195,21 @@
           </p:nvSpPr>
           <p:spPr>
             <a:xfrm>
-              <a:off x="1061087" y="3209457"/>
-              <a:ext cx="7499913" cy="0"/>
+              <a:off x="1065110" y="3210348"/>
+              <a:ext cx="7495890" cy="0"/>
             </a:xfrm>
             <a:custGeom>
               <a:avLst/>
               <a:pathLst>
-                <a:path w="7499913" h="0">
+                <a:path w="7495890" h="0">
                   <a:moveTo>
                     <a:pt x="0" y="0"/>
                   </a:moveTo>
                   <a:lnTo>
-                    <a:pt x="7499913" y="0"/>
+                    <a:pt x="7495890" y="0"/>
                   </a:lnTo>
                   <a:lnTo>
-                    <a:pt x="7499913" y="0"/>
+                    <a:pt x="7495890" y="0"/>
                   </a:lnTo>
                 </a:path>
               </a:pathLst>
@@ -3238,21 +3238,21 @@
           </p:nvSpPr>
           <p:spPr>
             <a:xfrm>
-              <a:off x="1061087" y="2331978"/>
-              <a:ext cx="7499913" cy="0"/>
+              <a:off x="1065110" y="2332427"/>
+              <a:ext cx="7495890" cy="0"/>
             </a:xfrm>
             <a:custGeom>
               <a:avLst/>
               <a:pathLst>
-                <a:path w="7499913" h="0">
+                <a:path w="7495890" h="0">
                   <a:moveTo>
                     <a:pt x="0" y="0"/>
                   </a:moveTo>
                   <a:lnTo>
-                    <a:pt x="7499913" y="0"/>
+                    <a:pt x="7495890" y="0"/>
                   </a:lnTo>
                   <a:lnTo>
-                    <a:pt x="7499913" y="0"/>
+                    <a:pt x="7495890" y="0"/>
                   </a:lnTo>
                 </a:path>
               </a:pathLst>
@@ -3281,21 +3281,21 @@
           </p:nvSpPr>
           <p:spPr>
             <a:xfrm>
-              <a:off x="1061087" y="1454500"/>
-              <a:ext cx="7499913" cy="0"/>
+              <a:off x="1065110" y="1454506"/>
+              <a:ext cx="7495890" cy="0"/>
             </a:xfrm>
             <a:custGeom>
               <a:avLst/>
               <a:pathLst>
-                <a:path w="7499913" h="0">
+                <a:path w="7495890" h="0">
                   <a:moveTo>
                     <a:pt x="0" y="0"/>
                   </a:moveTo>
                   <a:lnTo>
-                    <a:pt x="7499913" y="0"/>
+                    <a:pt x="7495890" y="0"/>
                   </a:lnTo>
                   <a:lnTo>
-                    <a:pt x="7499913" y="0"/>
+                    <a:pt x="7495890" y="0"/>
                   </a:lnTo>
                 </a:path>
               </a:pathLst>
@@ -3324,15 +3324,15 @@
           </p:nvSpPr>
           <p:spPr>
             <a:xfrm>
-              <a:off x="2250986" y="1441338"/>
-              <a:ext cx="0" cy="4536564"/>
+              <a:off x="2254371" y="1441338"/>
+              <a:ext cx="0" cy="4538850"/>
             </a:xfrm>
             <a:custGeom>
               <a:avLst/>
               <a:pathLst>
-                <a:path w="0" h="4536564">
+                <a:path w="0" h="4538850">
                   <a:moveTo>
-                    <a:pt x="0" y="4536564"/>
+                    <a:pt x="0" y="4538850"/>
                   </a:moveTo>
                   <a:lnTo>
                     <a:pt x="0" y="0"/>
@@ -3367,15 +3367,15 @@
           </p:nvSpPr>
           <p:spPr>
             <a:xfrm>
-              <a:off x="3994301" y="1441338"/>
-              <a:ext cx="0" cy="4536564"/>
+              <a:off x="3996750" y="1441338"/>
+              <a:ext cx="0" cy="4538850"/>
             </a:xfrm>
             <a:custGeom>
               <a:avLst/>
               <a:pathLst>
-                <a:path w="0" h="4536564">
+                <a:path w="0" h="4538850">
                   <a:moveTo>
-                    <a:pt x="0" y="4536564"/>
+                    <a:pt x="0" y="4538850"/>
                   </a:moveTo>
                   <a:lnTo>
                     <a:pt x="0" y="0"/>
@@ -3410,15 +3410,15 @@
           </p:nvSpPr>
           <p:spPr>
             <a:xfrm>
-              <a:off x="5737615" y="1441338"/>
-              <a:ext cx="0" cy="4536564"/>
+              <a:off x="5739130" y="1441338"/>
+              <a:ext cx="0" cy="4538850"/>
             </a:xfrm>
             <a:custGeom>
               <a:avLst/>
               <a:pathLst>
-                <a:path w="0" h="4536564">
+                <a:path w="0" h="4538850">
                   <a:moveTo>
-                    <a:pt x="0" y="4536564"/>
+                    <a:pt x="0" y="4538850"/>
                   </a:moveTo>
                   <a:lnTo>
                     <a:pt x="0" y="0"/>
@@ -3453,15 +3453,15 @@
           </p:nvSpPr>
           <p:spPr>
             <a:xfrm>
-              <a:off x="7480930" y="1441338"/>
-              <a:ext cx="0" cy="4536564"/>
+              <a:off x="7481509" y="1441338"/>
+              <a:ext cx="0" cy="4538850"/>
             </a:xfrm>
             <a:custGeom>
               <a:avLst/>
               <a:pathLst>
-                <a:path w="0" h="4536564">
+                <a:path w="0" h="4538850">
                   <a:moveTo>
-                    <a:pt x="0" y="4536564"/>
+                    <a:pt x="0" y="4538850"/>
                   </a:moveTo>
                   <a:lnTo>
                     <a:pt x="0" y="0"/>
@@ -3496,7 +3496,7 @@
           </p:nvSpPr>
           <p:spPr>
             <a:xfrm>
-              <a:off x="3298766" y="3878365"/>
+              <a:off x="3301571" y="3879610"/>
               <a:ext cx="66150" cy="66150"/>
             </a:xfrm>
             <a:prstGeom prst="ellipse">
@@ -3531,7 +3531,7 @@
           </p:nvSpPr>
           <p:spPr>
             <a:xfrm>
-              <a:off x="3743311" y="3878365"/>
+              <a:off x="3745878" y="3879610"/>
               <a:ext cx="66150" cy="66150"/>
             </a:xfrm>
             <a:prstGeom prst="ellipse">
@@ -3566,7 +3566,7 @@
           </p:nvSpPr>
           <p:spPr>
             <a:xfrm>
-              <a:off x="2775772" y="3562473"/>
+              <a:off x="2778857" y="3563558"/>
               <a:ext cx="66150" cy="66150"/>
             </a:xfrm>
             <a:prstGeom prst="ellipse">
@@ -3601,7 +3601,7 @@
           </p:nvSpPr>
           <p:spPr>
             <a:xfrm>
-              <a:off x="4336038" y="3808167"/>
+              <a:off x="4338287" y="3809376"/>
               <a:ext cx="66150" cy="66150"/>
             </a:xfrm>
             <a:prstGeom prst="ellipse">
@@ -3636,7 +3636,7 @@
           </p:nvSpPr>
           <p:spPr>
             <a:xfrm>
-              <a:off x="4728284" y="4282005"/>
+              <a:off x="4730322" y="4283453"/>
               <a:ext cx="66150" cy="66150"/>
             </a:xfrm>
             <a:prstGeom prst="ellipse">
@@ -3671,7 +3671,7 @@
           </p:nvSpPr>
           <p:spPr>
             <a:xfrm>
-              <a:off x="4763150" y="4387303"/>
+              <a:off x="4765170" y="4388804"/>
               <a:ext cx="66150" cy="66150"/>
             </a:xfrm>
             <a:prstGeom prst="ellipse">
@@ -3706,7 +3706,7 @@
           </p:nvSpPr>
           <p:spPr>
             <a:xfrm>
-              <a:off x="4954915" y="5054186"/>
+              <a:off x="4956832" y="5056024"/>
               <a:ext cx="66150" cy="66150"/>
             </a:xfrm>
             <a:prstGeom prst="ellipse">
@@ -3741,7 +3741,7 @@
           </p:nvSpPr>
           <p:spPr>
             <a:xfrm>
-              <a:off x="4292455" y="3281679"/>
+              <a:off x="4294728" y="3282623"/>
               <a:ext cx="66150" cy="66150"/>
             </a:xfrm>
             <a:prstGeom prst="ellipse">
@@ -3776,7 +3776,7 @@
           </p:nvSpPr>
           <p:spPr>
             <a:xfrm>
-              <a:off x="4222723" y="3562473"/>
+              <a:off x="4225032" y="3563558"/>
               <a:ext cx="66150" cy="66150"/>
             </a:xfrm>
             <a:prstGeom prst="ellipse">
@@ -3811,7 +3811,7 @@
           </p:nvSpPr>
           <p:spPr>
             <a:xfrm>
-              <a:off x="4728284" y="4194257"/>
+              <a:off x="4730322" y="4195661"/>
               <a:ext cx="66150" cy="66150"/>
             </a:xfrm>
             <a:prstGeom prst="ellipse">
@@ -3846,7 +3846,7 @@
           </p:nvSpPr>
           <p:spPr>
             <a:xfrm>
-              <a:off x="4728284" y="4439951"/>
+              <a:off x="4730322" y="4441479"/>
               <a:ext cx="66150" cy="66150"/>
             </a:xfrm>
             <a:prstGeom prst="ellipse">
@@ -3881,7 +3881,7 @@
           </p:nvSpPr>
           <p:spPr>
             <a:xfrm>
-              <a:off x="5826572" y="4685645"/>
+              <a:off x="5828021" y="4687297"/>
               <a:ext cx="66150" cy="66150"/>
             </a:xfrm>
             <a:prstGeom prst="ellipse">
@@ -3916,7 +3916,7 @@
           </p:nvSpPr>
           <p:spPr>
             <a:xfrm>
-              <a:off x="5233845" y="4527699"/>
+              <a:off x="5235612" y="4529271"/>
               <a:ext cx="66150" cy="66150"/>
             </a:xfrm>
             <a:prstGeom prst="ellipse">
@@ -3951,7 +3951,7 @@
           </p:nvSpPr>
           <p:spPr>
             <a:xfrm>
-              <a:off x="5321011" y="4896240"/>
+              <a:off x="5322731" y="4897998"/>
               <a:ext cx="66150" cy="66150"/>
             </a:xfrm>
             <a:prstGeom prst="ellipse">
@@ -3986,7 +3986,7 @@
           </p:nvSpPr>
           <p:spPr>
             <a:xfrm>
-              <a:off x="7883684" y="5738620"/>
+              <a:off x="7884029" y="5740802"/>
               <a:ext cx="66150" cy="66150"/>
             </a:xfrm>
             <a:prstGeom prst="ellipse">
@@ -4021,7 +4021,7 @@
           </p:nvSpPr>
           <p:spPr>
             <a:xfrm>
-              <a:off x="8187020" y="5738620"/>
+              <a:off x="8187203" y="5740802"/>
               <a:ext cx="66150" cy="66150"/>
             </a:xfrm>
             <a:prstGeom prst="ellipse">
@@ -4056,7 +4056,7 @@
           </p:nvSpPr>
           <p:spPr>
             <a:xfrm>
-              <a:off x="8049298" y="4983988"/>
+              <a:off x="8049555" y="4985790"/>
               <a:ext cx="66150" cy="66150"/>
             </a:xfrm>
             <a:prstGeom prst="ellipse">
@@ -4091,7 +4091,7 @@
           </p:nvSpPr>
           <p:spPr>
             <a:xfrm>
-              <a:off x="2566574" y="1877714"/>
+              <a:off x="2569772" y="1877950"/>
               <a:ext cx="66150" cy="66150"/>
             </a:xfrm>
             <a:prstGeom prst="ellipse">
@@ -4126,7 +4126,7 @@
           </p:nvSpPr>
           <p:spPr>
             <a:xfrm>
-              <a:off x="1546735" y="2228705"/>
+              <a:off x="1550480" y="2229119"/>
               <a:ext cx="66150" cy="66150"/>
             </a:xfrm>
             <a:prstGeom prst="ellipse">
@@ -4161,7 +4161,7 @@
           </p:nvSpPr>
           <p:spPr>
             <a:xfrm>
-              <a:off x="1930264" y="1614470"/>
+              <a:off x="1933803" y="1614574"/>
               <a:ext cx="66150" cy="66150"/>
             </a:xfrm>
             <a:prstGeom prst="ellipse">
@@ -4196,7 +4196,7 @@
           </p:nvSpPr>
           <p:spPr>
             <a:xfrm>
-              <a:off x="3028552" y="3790617"/>
+              <a:off x="3031502" y="3791818"/>
               <a:ext cx="66150" cy="66150"/>
             </a:xfrm>
             <a:prstGeom prst="ellipse">
@@ -4231,7 +4231,7 @@
           </p:nvSpPr>
           <p:spPr>
             <a:xfrm>
-              <a:off x="4867749" y="4843591"/>
+              <a:off x="4869713" y="4845323"/>
               <a:ext cx="66150" cy="66150"/>
             </a:xfrm>
             <a:prstGeom prst="ellipse">
@@ -4266,7 +4266,7 @@
           </p:nvSpPr>
           <p:spPr>
             <a:xfrm>
-              <a:off x="4719567" y="4896240"/>
+              <a:off x="4721610" y="4897998"/>
               <a:ext cx="66150" cy="66150"/>
             </a:xfrm>
             <a:prstGeom prst="ellipse">
@@ -4301,7 +4301,7 @@
           </p:nvSpPr>
           <p:spPr>
             <a:xfrm>
-              <a:off x="5425610" y="5229682"/>
+              <a:off x="5427274" y="5231608"/>
               <a:ext cx="66150" cy="66150"/>
             </a:xfrm>
             <a:prstGeom prst="ellipse">
@@ -4336,7 +4336,7 @@
           </p:nvSpPr>
           <p:spPr>
             <a:xfrm>
-              <a:off x="5434326" y="4194257"/>
+              <a:off x="5435986" y="4195661"/>
               <a:ext cx="66150" cy="66150"/>
             </a:xfrm>
             <a:prstGeom prst="ellipse">
@@ -4371,7 +4371,7 @@
           </p:nvSpPr>
           <p:spPr>
             <a:xfrm>
-              <a:off x="2104596" y="2772742"/>
+              <a:off x="2108041" y="2773429"/>
               <a:ext cx="66150" cy="66150"/>
             </a:xfrm>
             <a:prstGeom prst="ellipse">
@@ -4406,7 +4406,7 @@
           </p:nvSpPr>
           <p:spPr>
             <a:xfrm>
-              <a:off x="2461975" y="3000886"/>
+              <a:off x="2465229" y="3001689"/>
               <a:ext cx="66150" cy="66150"/>
             </a:xfrm>
             <a:prstGeom prst="ellipse">
@@ -4441,7 +4441,7 @@
           </p:nvSpPr>
           <p:spPr>
             <a:xfrm>
-              <a:off x="1368917" y="2228705"/>
+              <a:off x="1372757" y="2229119"/>
               <a:ext cx="66150" cy="66150"/>
             </a:xfrm>
             <a:prstGeom prst="ellipse">
@@ -4476,7 +4476,7 @@
           </p:nvSpPr>
           <p:spPr>
             <a:xfrm>
-              <a:off x="4257589" y="4790943"/>
+              <a:off x="4259880" y="4792647"/>
               <a:ext cx="66150" cy="66150"/>
             </a:xfrm>
             <a:prstGeom prst="ellipse">
@@ -4511,7 +4511,7 @@
           </p:nvSpPr>
           <p:spPr>
             <a:xfrm>
-              <a:off x="3560263" y="4106509"/>
+              <a:off x="3562928" y="4107869"/>
               <a:ext cx="66150" cy="66150"/>
             </a:xfrm>
             <a:prstGeom prst="ellipse">
@@ -4546,7 +4546,7 @@
           </p:nvSpPr>
           <p:spPr>
             <a:xfrm>
-              <a:off x="4954915" y="4931339"/>
+              <a:off x="4956832" y="4933115"/>
               <a:ext cx="66150" cy="66150"/>
             </a:xfrm>
             <a:prstGeom prst="ellipse">
@@ -4581,7 +4581,7 @@
           </p:nvSpPr>
           <p:spPr>
             <a:xfrm>
-              <a:off x="3577696" y="3808167"/>
+              <a:off x="3580352" y="3809376"/>
               <a:ext cx="66150" cy="66150"/>
             </a:xfrm>
             <a:prstGeom prst="ellipse">
@@ -4616,8 +4616,8 @@
           </p:nvSpPr>
           <p:spPr>
             <a:xfrm>
-              <a:off x="874098" y="5801842"/>
-              <a:ext cx="124358" cy="80101"/>
+              <a:off x="872818" y="5804563"/>
+              <a:ext cx="129661" cy="79095"/>
             </a:xfrm>
             <a:prstGeom prst="rect">
               <a:avLst/>
@@ -4646,8 +4646,8 @@
                       <a:alpha val="100000"/>
                     </a:srgbClr>
                   </a:solidFill>
-                  <a:latin typeface="Helvetica"/>
-                  <a:cs typeface="Helvetica"/>
+                  <a:latin typeface="Avenir Next"/>
+                  <a:cs typeface="Avenir Next"/>
                 </a:rPr>
                 <a:t>10</a:t>
               </a:r>
@@ -4662,8 +4662,8 @@
           </p:nvSpPr>
           <p:spPr>
             <a:xfrm>
-              <a:off x="874098" y="4924364"/>
-              <a:ext cx="124358" cy="80101"/>
+              <a:off x="872818" y="4926642"/>
+              <a:ext cx="129661" cy="79095"/>
             </a:xfrm>
             <a:prstGeom prst="rect">
               <a:avLst/>
@@ -4692,8 +4692,8 @@
                       <a:alpha val="100000"/>
                     </a:srgbClr>
                   </a:solidFill>
-                  <a:latin typeface="Helvetica"/>
-                  <a:cs typeface="Helvetica"/>
+                  <a:latin typeface="Avenir Next"/>
+                  <a:cs typeface="Avenir Next"/>
                 </a:rPr>
                 <a:t>15</a:t>
               </a:r>
@@ -4708,8 +4708,8 @@
           </p:nvSpPr>
           <p:spPr>
             <a:xfrm>
-              <a:off x="874098" y="4046885"/>
-              <a:ext cx="124358" cy="80101"/>
+              <a:off x="872818" y="4048721"/>
+              <a:ext cx="129661" cy="79095"/>
             </a:xfrm>
             <a:prstGeom prst="rect">
               <a:avLst/>
@@ -4738,8 +4738,8 @@
                       <a:alpha val="100000"/>
                     </a:srgbClr>
                   </a:solidFill>
-                  <a:latin typeface="Helvetica"/>
-                  <a:cs typeface="Helvetica"/>
+                  <a:latin typeface="Avenir Next"/>
+                  <a:cs typeface="Avenir Next"/>
                 </a:rPr>
                 <a:t>20</a:t>
               </a:r>
@@ -4754,8 +4754,8 @@
           </p:nvSpPr>
           <p:spPr>
             <a:xfrm>
-              <a:off x="874098" y="3169406"/>
-              <a:ext cx="124358" cy="80101"/>
+              <a:off x="872818" y="3170800"/>
+              <a:ext cx="129661" cy="79095"/>
             </a:xfrm>
             <a:prstGeom prst="rect">
               <a:avLst/>
@@ -4784,8 +4784,8 @@
                       <a:alpha val="100000"/>
                     </a:srgbClr>
                   </a:solidFill>
-                  <a:latin typeface="Helvetica"/>
-                  <a:cs typeface="Helvetica"/>
+                  <a:latin typeface="Avenir Next"/>
+                  <a:cs typeface="Avenir Next"/>
                 </a:rPr>
                 <a:t>25</a:t>
               </a:r>
@@ -4800,8 +4800,8 @@
           </p:nvSpPr>
           <p:spPr>
             <a:xfrm>
-              <a:off x="874098" y="2291928"/>
-              <a:ext cx="124358" cy="80101"/>
+              <a:off x="872818" y="2292879"/>
+              <a:ext cx="129661" cy="79095"/>
             </a:xfrm>
             <a:prstGeom prst="rect">
               <a:avLst/>
@@ -4830,8 +4830,8 @@
                       <a:alpha val="100000"/>
                     </a:srgbClr>
                   </a:solidFill>
-                  <a:latin typeface="Helvetica"/>
-                  <a:cs typeface="Helvetica"/>
+                  <a:latin typeface="Avenir Next"/>
+                  <a:cs typeface="Avenir Next"/>
                 </a:rPr>
                 <a:t>30</a:t>
               </a:r>
@@ -4846,8 +4846,8 @@
           </p:nvSpPr>
           <p:spPr>
             <a:xfrm>
-              <a:off x="874098" y="1414449"/>
-              <a:ext cx="124358" cy="80101"/>
+              <a:off x="872818" y="1414959"/>
+              <a:ext cx="129661" cy="79095"/>
             </a:xfrm>
             <a:prstGeom prst="rect">
               <a:avLst/>
@@ -4876,8 +4876,8 @@
                       <a:alpha val="100000"/>
                     </a:srgbClr>
                   </a:solidFill>
-                  <a:latin typeface="Helvetica"/>
-                  <a:cs typeface="Helvetica"/>
+                  <a:latin typeface="Avenir Next"/>
+                  <a:cs typeface="Avenir Next"/>
                 </a:rPr>
                 <a:t>35</a:t>
               </a:r>
@@ -4892,7 +4892,7 @@
           </p:nvSpPr>
           <p:spPr>
             <a:xfrm>
-              <a:off x="1026292" y="5841893"/>
+              <a:off x="1030315" y="5844110"/>
               <a:ext cx="34794" cy="0"/>
             </a:xfrm>
             <a:custGeom>
@@ -4932,7 +4932,7 @@
           </p:nvSpPr>
           <p:spPr>
             <a:xfrm>
-              <a:off x="1026292" y="4964414"/>
+              <a:off x="1030315" y="4966190"/>
               <a:ext cx="34794" cy="0"/>
             </a:xfrm>
             <a:custGeom>
@@ -4972,7 +4972,7 @@
           </p:nvSpPr>
           <p:spPr>
             <a:xfrm>
-              <a:off x="1026292" y="4086936"/>
+              <a:off x="1030315" y="4088269"/>
               <a:ext cx="34794" cy="0"/>
             </a:xfrm>
             <a:custGeom>
@@ -5012,7 +5012,7 @@
           </p:nvSpPr>
           <p:spPr>
             <a:xfrm>
-              <a:off x="1026292" y="3209457"/>
+              <a:off x="1030315" y="3210348"/>
               <a:ext cx="34794" cy="0"/>
             </a:xfrm>
             <a:custGeom>
@@ -5052,7 +5052,7 @@
           </p:nvSpPr>
           <p:spPr>
             <a:xfrm>
-              <a:off x="1026292" y="2331978"/>
+              <a:off x="1030315" y="2332427"/>
               <a:ext cx="34794" cy="0"/>
             </a:xfrm>
             <a:custGeom>
@@ -5092,7 +5092,7 @@
           </p:nvSpPr>
           <p:spPr>
             <a:xfrm>
-              <a:off x="1026292" y="1454500"/>
+              <a:off x="1030315" y="1454506"/>
               <a:ext cx="34794" cy="0"/>
             </a:xfrm>
             <a:custGeom>
@@ -5132,7 +5132,7 @@
           </p:nvSpPr>
           <p:spPr>
             <a:xfrm>
-              <a:off x="2250986" y="5977902"/>
+              <a:off x="2254371" y="5980188"/>
               <a:ext cx="0" cy="34794"/>
             </a:xfrm>
             <a:custGeom>
@@ -5172,7 +5172,7 @@
           </p:nvSpPr>
           <p:spPr>
             <a:xfrm>
-              <a:off x="3994301" y="5977902"/>
+              <a:off x="3996750" y="5980188"/>
               <a:ext cx="0" cy="34794"/>
             </a:xfrm>
             <a:custGeom>
@@ -5212,7 +5212,7 @@
           </p:nvSpPr>
           <p:spPr>
             <a:xfrm>
-              <a:off x="5737615" y="5977902"/>
+              <a:off x="5739130" y="5980188"/>
               <a:ext cx="0" cy="34794"/>
             </a:xfrm>
             <a:custGeom>
@@ -5252,7 +5252,7 @@
           </p:nvSpPr>
           <p:spPr>
             <a:xfrm>
-              <a:off x="7480930" y="5977902"/>
+              <a:off x="7481509" y="5980188"/>
               <a:ext cx="0" cy="34794"/>
             </a:xfrm>
             <a:custGeom>
@@ -5292,8 +5292,8 @@
           </p:nvSpPr>
           <p:spPr>
             <a:xfrm>
-              <a:off x="2219896" y="6040532"/>
-              <a:ext cx="62179" cy="80101"/>
+              <a:off x="2221956" y="6042818"/>
+              <a:ext cx="64830" cy="79095"/>
             </a:xfrm>
             <a:prstGeom prst="rect">
               <a:avLst/>
@@ -5322,8 +5322,8 @@
                       <a:alpha val="100000"/>
                     </a:srgbClr>
                   </a:solidFill>
-                  <a:latin typeface="Helvetica"/>
-                  <a:cs typeface="Helvetica"/>
+                  <a:latin typeface="Avenir Next"/>
+                  <a:cs typeface="Avenir Next"/>
                 </a:rPr>
                 <a:t>2</a:t>
               </a:r>
@@ -5338,8 +5338,8 @@
           </p:nvSpPr>
           <p:spPr>
             <a:xfrm>
-              <a:off x="3963211" y="6040532"/>
-              <a:ext cx="62179" cy="80101"/>
+              <a:off x="3964335" y="6042818"/>
+              <a:ext cx="64830" cy="79095"/>
             </a:xfrm>
             <a:prstGeom prst="rect">
               <a:avLst/>
@@ -5368,8 +5368,8 @@
                       <a:alpha val="100000"/>
                     </a:srgbClr>
                   </a:solidFill>
-                  <a:latin typeface="Helvetica"/>
-                  <a:cs typeface="Helvetica"/>
+                  <a:latin typeface="Avenir Next"/>
+                  <a:cs typeface="Avenir Next"/>
                 </a:rPr>
                 <a:t>3</a:t>
               </a:r>
@@ -5384,8 +5384,8 @@
           </p:nvSpPr>
           <p:spPr>
             <a:xfrm>
-              <a:off x="5706526" y="6040532"/>
-              <a:ext cx="62179" cy="80101"/>
+              <a:off x="5706714" y="6042818"/>
+              <a:ext cx="64830" cy="79095"/>
             </a:xfrm>
             <a:prstGeom prst="rect">
               <a:avLst/>
@@ -5414,8 +5414,8 @@
                       <a:alpha val="100000"/>
                     </a:srgbClr>
                   </a:solidFill>
-                  <a:latin typeface="Helvetica"/>
-                  <a:cs typeface="Helvetica"/>
+                  <a:latin typeface="Avenir Next"/>
+                  <a:cs typeface="Avenir Next"/>
                 </a:rPr>
                 <a:t>4</a:t>
               </a:r>
@@ -5430,8 +5430,8 @@
           </p:nvSpPr>
           <p:spPr>
             <a:xfrm>
-              <a:off x="7449840" y="6040532"/>
-              <a:ext cx="62179" cy="80101"/>
+              <a:off x="7449094" y="6042818"/>
+              <a:ext cx="64830" cy="79095"/>
             </a:xfrm>
             <a:prstGeom prst="rect">
               <a:avLst/>
@@ -5460,8 +5460,8 @@
                       <a:alpha val="100000"/>
                     </a:srgbClr>
                   </a:solidFill>
-                  <a:latin typeface="Helvetica"/>
-                  <a:cs typeface="Helvetica"/>
+                  <a:latin typeface="Avenir Next"/>
+                  <a:cs typeface="Avenir Next"/>
                 </a:rPr>
                 <a:t>5</a:t>
               </a:r>
@@ -5476,8 +5476,8 @@
           </p:nvSpPr>
           <p:spPr>
             <a:xfrm>
-              <a:off x="4741229" y="6180208"/>
-              <a:ext cx="139628" cy="100218"/>
+              <a:off x="4738806" y="6181489"/>
+              <a:ext cx="148498" cy="98938"/>
             </a:xfrm>
             <a:prstGeom prst="rect">
               <a:avLst/>
@@ -5506,8 +5506,8 @@
                       <a:alpha val="100000"/>
                     </a:srgbClr>
                   </a:solidFill>
-                  <a:latin typeface="Helvetica"/>
-                  <a:cs typeface="Helvetica"/>
+                  <a:latin typeface="Avenir Next"/>
+                  <a:cs typeface="Avenir Next"/>
                 </a:rPr>
                 <a:t>wt</a:t>
               </a:r>
@@ -5522,8 +5522,8 @@
           </p:nvSpPr>
           <p:spPr>
             <a:xfrm rot="-5400000">
-              <a:off x="622362" y="3659511"/>
-              <a:ext cx="271851" cy="100218"/>
+              <a:off x="607457" y="3661294"/>
+              <a:ext cx="300380" cy="98938"/>
             </a:xfrm>
             <a:prstGeom prst="rect">
               <a:avLst/>
@@ -5552,8 +5552,8 @@
                       <a:alpha val="100000"/>
                     </a:srgbClr>
                   </a:solidFill>
-                  <a:latin typeface="Helvetica"/>
-                  <a:cs typeface="Helvetica"/>
+                  <a:latin typeface="Avenir Next"/>
+                  <a:cs typeface="Avenir Next"/>
                 </a:rPr>
                 <a:t>mpg</a:t>
               </a:r>

--- a/tests/testthat/temp_fullslide_43.pptx
+++ b/tests/testthat/temp_fullslide_43.pptx
@@ -2610,8 +2610,8 @@
           </p:nvSpPr>
           <p:spPr>
             <a:xfrm>
-              <a:off x="1065110" y="1441338"/>
-              <a:ext cx="7495890" cy="4538850"/>
+              <a:off x="1067762" y="1441338"/>
+              <a:ext cx="7493238" cy="4534095"/>
             </a:xfrm>
             <a:prstGeom prst="rect">
               <a:avLst/>
@@ -2636,21 +2636,21 @@
           </p:nvSpPr>
           <p:spPr>
             <a:xfrm>
-              <a:off x="1065110" y="5405150"/>
-              <a:ext cx="7495890" cy="0"/>
+              <a:off x="1067762" y="5400998"/>
+              <a:ext cx="7493238" cy="0"/>
             </a:xfrm>
             <a:custGeom>
               <a:avLst/>
               <a:pathLst>
-                <a:path w="7495890" h="0">
+                <a:path w="7493238" h="0">
                   <a:moveTo>
                     <a:pt x="0" y="0"/>
                   </a:moveTo>
                   <a:lnTo>
-                    <a:pt x="7495890" y="0"/>
+                    <a:pt x="7493238" y="0"/>
                   </a:lnTo>
                   <a:lnTo>
-                    <a:pt x="7495890" y="0"/>
+                    <a:pt x="7493238" y="0"/>
                   </a:lnTo>
                 </a:path>
               </a:pathLst>
@@ -2679,21 +2679,21 @@
           </p:nvSpPr>
           <p:spPr>
             <a:xfrm>
-              <a:off x="1065110" y="4527229"/>
-              <a:ext cx="7495890" cy="0"/>
+              <a:off x="1067762" y="4523996"/>
+              <a:ext cx="7493238" cy="0"/>
             </a:xfrm>
             <a:custGeom>
               <a:avLst/>
               <a:pathLst>
-                <a:path w="7495890" h="0">
+                <a:path w="7493238" h="0">
                   <a:moveTo>
                     <a:pt x="0" y="0"/>
                   </a:moveTo>
                   <a:lnTo>
-                    <a:pt x="7495890" y="0"/>
+                    <a:pt x="7493238" y="0"/>
                   </a:lnTo>
                   <a:lnTo>
-                    <a:pt x="7495890" y="0"/>
+                    <a:pt x="7493238" y="0"/>
                   </a:lnTo>
                 </a:path>
               </a:pathLst>
@@ -2722,21 +2722,21 @@
           </p:nvSpPr>
           <p:spPr>
             <a:xfrm>
-              <a:off x="1065110" y="3649308"/>
-              <a:ext cx="7495890" cy="0"/>
+              <a:off x="1067762" y="3646995"/>
+              <a:ext cx="7493238" cy="0"/>
             </a:xfrm>
             <a:custGeom>
               <a:avLst/>
               <a:pathLst>
-                <a:path w="7495890" h="0">
+                <a:path w="7493238" h="0">
                   <a:moveTo>
                     <a:pt x="0" y="0"/>
                   </a:moveTo>
                   <a:lnTo>
-                    <a:pt x="7495890" y="0"/>
+                    <a:pt x="7493238" y="0"/>
                   </a:lnTo>
                   <a:lnTo>
-                    <a:pt x="7495890" y="0"/>
+                    <a:pt x="7493238" y="0"/>
                   </a:lnTo>
                 </a:path>
               </a:pathLst>
@@ -2765,21 +2765,21 @@
           </p:nvSpPr>
           <p:spPr>
             <a:xfrm>
-              <a:off x="1065110" y="2771388"/>
-              <a:ext cx="7495890" cy="0"/>
+              <a:off x="1067762" y="2769994"/>
+              <a:ext cx="7493238" cy="0"/>
             </a:xfrm>
             <a:custGeom>
               <a:avLst/>
               <a:pathLst>
-                <a:path w="7495890" h="0">
+                <a:path w="7493238" h="0">
                   <a:moveTo>
                     <a:pt x="0" y="0"/>
                   </a:moveTo>
                   <a:lnTo>
-                    <a:pt x="7495890" y="0"/>
+                    <a:pt x="7493238" y="0"/>
                   </a:lnTo>
                   <a:lnTo>
-                    <a:pt x="7495890" y="0"/>
+                    <a:pt x="7493238" y="0"/>
                   </a:lnTo>
                 </a:path>
               </a:pathLst>
@@ -2808,21 +2808,21 @@
           </p:nvSpPr>
           <p:spPr>
             <a:xfrm>
-              <a:off x="1065110" y="1893467"/>
-              <a:ext cx="7495890" cy="0"/>
+              <a:off x="1067762" y="1892993"/>
+              <a:ext cx="7493238" cy="0"/>
             </a:xfrm>
             <a:custGeom>
               <a:avLst/>
               <a:pathLst>
-                <a:path w="7495890" h="0">
+                <a:path w="7493238" h="0">
                   <a:moveTo>
                     <a:pt x="0" y="0"/>
                   </a:moveTo>
                   <a:lnTo>
-                    <a:pt x="7495890" y="0"/>
+                    <a:pt x="7493238" y="0"/>
                   </a:lnTo>
                   <a:lnTo>
-                    <a:pt x="7495890" y="0"/>
+                    <a:pt x="7493238" y="0"/>
                   </a:lnTo>
                 </a:path>
               </a:pathLst>
@@ -2851,15 +2851,15 @@
           </p:nvSpPr>
           <p:spPr>
             <a:xfrm>
-              <a:off x="1383181" y="1441338"/>
-              <a:ext cx="0" cy="4538850"/>
+              <a:off x="1385721" y="1441338"/>
+              <a:ext cx="0" cy="4534095"/>
             </a:xfrm>
             <a:custGeom>
               <a:avLst/>
               <a:pathLst>
-                <a:path w="0" h="4538850">
+                <a:path w="0" h="4534095">
                   <a:moveTo>
-                    <a:pt x="0" y="4538850"/>
+                    <a:pt x="0" y="4534095"/>
                   </a:moveTo>
                   <a:lnTo>
                     <a:pt x="0" y="0"/>
@@ -2894,15 +2894,15 @@
           </p:nvSpPr>
           <p:spPr>
             <a:xfrm>
-              <a:off x="3125561" y="1441338"/>
-              <a:ext cx="0" cy="4538850"/>
+              <a:off x="3127484" y="1441338"/>
+              <a:ext cx="0" cy="4534095"/>
             </a:xfrm>
             <a:custGeom>
               <a:avLst/>
               <a:pathLst>
-                <a:path w="0" h="4538850">
+                <a:path w="0" h="4534095">
                   <a:moveTo>
-                    <a:pt x="0" y="4538850"/>
+                    <a:pt x="0" y="4534095"/>
                   </a:moveTo>
                   <a:lnTo>
                     <a:pt x="0" y="0"/>
@@ -2937,15 +2937,15 @@
           </p:nvSpPr>
           <p:spPr>
             <a:xfrm>
-              <a:off x="4867940" y="1441338"/>
-              <a:ext cx="0" cy="4538850"/>
+              <a:off x="4869247" y="1441338"/>
+              <a:ext cx="0" cy="4534095"/>
             </a:xfrm>
             <a:custGeom>
               <a:avLst/>
               <a:pathLst>
-                <a:path w="0" h="4538850">
+                <a:path w="0" h="4534095">
                   <a:moveTo>
-                    <a:pt x="0" y="4538850"/>
+                    <a:pt x="0" y="4534095"/>
                   </a:moveTo>
                   <a:lnTo>
                     <a:pt x="0" y="0"/>
@@ -2980,15 +2980,15 @@
           </p:nvSpPr>
           <p:spPr>
             <a:xfrm>
-              <a:off x="6610320" y="1441338"/>
-              <a:ext cx="0" cy="4538850"/>
+              <a:off x="6611010" y="1441338"/>
+              <a:ext cx="0" cy="4534095"/>
             </a:xfrm>
             <a:custGeom>
               <a:avLst/>
               <a:pathLst>
-                <a:path w="0" h="4538850">
+                <a:path w="0" h="4534095">
                   <a:moveTo>
-                    <a:pt x="0" y="4538850"/>
+                    <a:pt x="0" y="4534095"/>
                   </a:moveTo>
                   <a:lnTo>
                     <a:pt x="0" y="0"/>
@@ -3023,15 +3023,15 @@
           </p:nvSpPr>
           <p:spPr>
             <a:xfrm>
-              <a:off x="8352699" y="1441338"/>
-              <a:ext cx="0" cy="4538850"/>
+              <a:off x="8352773" y="1441338"/>
+              <a:ext cx="0" cy="4534095"/>
             </a:xfrm>
             <a:custGeom>
               <a:avLst/>
               <a:pathLst>
-                <a:path w="0" h="4538850">
+                <a:path w="0" h="4534095">
                   <a:moveTo>
-                    <a:pt x="0" y="4538850"/>
+                    <a:pt x="0" y="4534095"/>
                   </a:moveTo>
                   <a:lnTo>
                     <a:pt x="0" y="0"/>
@@ -3066,21 +3066,21 @@
           </p:nvSpPr>
           <p:spPr>
             <a:xfrm>
-              <a:off x="1065110" y="5844110"/>
-              <a:ext cx="7495890" cy="0"/>
+              <a:off x="1067762" y="5839498"/>
+              <a:ext cx="7493238" cy="0"/>
             </a:xfrm>
             <a:custGeom>
               <a:avLst/>
               <a:pathLst>
-                <a:path w="7495890" h="0">
+                <a:path w="7493238" h="0">
                   <a:moveTo>
                     <a:pt x="0" y="0"/>
                   </a:moveTo>
                   <a:lnTo>
-                    <a:pt x="7495890" y="0"/>
+                    <a:pt x="7493238" y="0"/>
                   </a:lnTo>
                   <a:lnTo>
-                    <a:pt x="7495890" y="0"/>
+                    <a:pt x="7493238" y="0"/>
                   </a:lnTo>
                 </a:path>
               </a:pathLst>
@@ -3109,21 +3109,21 @@
           </p:nvSpPr>
           <p:spPr>
             <a:xfrm>
-              <a:off x="1065110" y="4966190"/>
-              <a:ext cx="7495890" cy="0"/>
+              <a:off x="1067762" y="4962497"/>
+              <a:ext cx="7493238" cy="0"/>
             </a:xfrm>
             <a:custGeom>
               <a:avLst/>
               <a:pathLst>
-                <a:path w="7495890" h="0">
+                <a:path w="7493238" h="0">
                   <a:moveTo>
                     <a:pt x="0" y="0"/>
                   </a:moveTo>
                   <a:lnTo>
-                    <a:pt x="7495890" y="0"/>
+                    <a:pt x="7493238" y="0"/>
                   </a:lnTo>
                   <a:lnTo>
-                    <a:pt x="7495890" y="0"/>
+                    <a:pt x="7493238" y="0"/>
                   </a:lnTo>
                 </a:path>
               </a:pathLst>
@@ -3152,21 +3152,21 @@
           </p:nvSpPr>
           <p:spPr>
             <a:xfrm>
-              <a:off x="1065110" y="4088269"/>
-              <a:ext cx="7495890" cy="0"/>
+              <a:off x="1067762" y="4085496"/>
+              <a:ext cx="7493238" cy="0"/>
             </a:xfrm>
             <a:custGeom>
               <a:avLst/>
               <a:pathLst>
-                <a:path w="7495890" h="0">
+                <a:path w="7493238" h="0">
                   <a:moveTo>
                     <a:pt x="0" y="0"/>
                   </a:moveTo>
                   <a:lnTo>
-                    <a:pt x="7495890" y="0"/>
+                    <a:pt x="7493238" y="0"/>
                   </a:lnTo>
                   <a:lnTo>
-                    <a:pt x="7495890" y="0"/>
+                    <a:pt x="7493238" y="0"/>
                   </a:lnTo>
                 </a:path>
               </a:pathLst>
@@ -3195,21 +3195,21 @@
           </p:nvSpPr>
           <p:spPr>
             <a:xfrm>
-              <a:off x="1065110" y="3210348"/>
-              <a:ext cx="7495890" cy="0"/>
+              <a:off x="1067762" y="3208495"/>
+              <a:ext cx="7493238" cy="0"/>
             </a:xfrm>
             <a:custGeom>
               <a:avLst/>
               <a:pathLst>
-                <a:path w="7495890" h="0">
+                <a:path w="7493238" h="0">
                   <a:moveTo>
                     <a:pt x="0" y="0"/>
                   </a:moveTo>
                   <a:lnTo>
-                    <a:pt x="7495890" y="0"/>
+                    <a:pt x="7493238" y="0"/>
                   </a:lnTo>
                   <a:lnTo>
-                    <a:pt x="7495890" y="0"/>
+                    <a:pt x="7493238" y="0"/>
                   </a:lnTo>
                 </a:path>
               </a:pathLst>
@@ -3238,21 +3238,21 @@
           </p:nvSpPr>
           <p:spPr>
             <a:xfrm>
-              <a:off x="1065110" y="2332427"/>
-              <a:ext cx="7495890" cy="0"/>
+              <a:off x="1067762" y="2331494"/>
+              <a:ext cx="7493238" cy="0"/>
             </a:xfrm>
             <a:custGeom>
               <a:avLst/>
               <a:pathLst>
-                <a:path w="7495890" h="0">
+                <a:path w="7493238" h="0">
                   <a:moveTo>
                     <a:pt x="0" y="0"/>
                   </a:moveTo>
                   <a:lnTo>
-                    <a:pt x="7495890" y="0"/>
+                    <a:pt x="7493238" y="0"/>
                   </a:lnTo>
                   <a:lnTo>
-                    <a:pt x="7495890" y="0"/>
+                    <a:pt x="7493238" y="0"/>
                   </a:lnTo>
                 </a:path>
               </a:pathLst>
@@ -3281,21 +3281,21 @@
           </p:nvSpPr>
           <p:spPr>
             <a:xfrm>
-              <a:off x="1065110" y="1454506"/>
-              <a:ext cx="7495890" cy="0"/>
+              <a:off x="1067762" y="1454493"/>
+              <a:ext cx="7493238" cy="0"/>
             </a:xfrm>
             <a:custGeom>
               <a:avLst/>
               <a:pathLst>
-                <a:path w="7495890" h="0">
+                <a:path w="7493238" h="0">
                   <a:moveTo>
                     <a:pt x="0" y="0"/>
                   </a:moveTo>
                   <a:lnTo>
-                    <a:pt x="7495890" y="0"/>
+                    <a:pt x="7493238" y="0"/>
                   </a:lnTo>
                   <a:lnTo>
-                    <a:pt x="7495890" y="0"/>
+                    <a:pt x="7493238" y="0"/>
                   </a:lnTo>
                 </a:path>
               </a:pathLst>
@@ -3324,15 +3324,15 @@
           </p:nvSpPr>
           <p:spPr>
             <a:xfrm>
-              <a:off x="2254371" y="1441338"/>
-              <a:ext cx="0" cy="4538850"/>
+              <a:off x="2256602" y="1441338"/>
+              <a:ext cx="0" cy="4534095"/>
             </a:xfrm>
             <a:custGeom>
               <a:avLst/>
               <a:pathLst>
-                <a:path w="0" h="4538850">
+                <a:path w="0" h="4534095">
                   <a:moveTo>
-                    <a:pt x="0" y="4538850"/>
+                    <a:pt x="0" y="4534095"/>
                   </a:moveTo>
                   <a:lnTo>
                     <a:pt x="0" y="0"/>
@@ -3367,15 +3367,15 @@
           </p:nvSpPr>
           <p:spPr>
             <a:xfrm>
-              <a:off x="3996750" y="1441338"/>
-              <a:ext cx="0" cy="4538850"/>
+              <a:off x="3998365" y="1441338"/>
+              <a:ext cx="0" cy="4534095"/>
             </a:xfrm>
             <a:custGeom>
               <a:avLst/>
               <a:pathLst>
-                <a:path w="0" h="4538850">
+                <a:path w="0" h="4534095">
                   <a:moveTo>
-                    <a:pt x="0" y="4538850"/>
+                    <a:pt x="0" y="4534095"/>
                   </a:moveTo>
                   <a:lnTo>
                     <a:pt x="0" y="0"/>
@@ -3410,15 +3410,15 @@
           </p:nvSpPr>
           <p:spPr>
             <a:xfrm>
-              <a:off x="5739130" y="1441338"/>
-              <a:ext cx="0" cy="4538850"/>
+              <a:off x="5740128" y="1441338"/>
+              <a:ext cx="0" cy="4534095"/>
             </a:xfrm>
             <a:custGeom>
               <a:avLst/>
               <a:pathLst>
-                <a:path w="0" h="4538850">
+                <a:path w="0" h="4534095">
                   <a:moveTo>
-                    <a:pt x="0" y="4538850"/>
+                    <a:pt x="0" y="4534095"/>
                   </a:moveTo>
                   <a:lnTo>
                     <a:pt x="0" y="0"/>
@@ -3453,15 +3453,15 @@
           </p:nvSpPr>
           <p:spPr>
             <a:xfrm>
-              <a:off x="7481509" y="1441338"/>
-              <a:ext cx="0" cy="4538850"/>
+              <a:off x="7481891" y="1441338"/>
+              <a:ext cx="0" cy="4534095"/>
             </a:xfrm>
             <a:custGeom>
               <a:avLst/>
               <a:pathLst>
-                <a:path w="0" h="4538850">
+                <a:path w="0" h="4534095">
                   <a:moveTo>
-                    <a:pt x="0" y="4538850"/>
+                    <a:pt x="0" y="4534095"/>
                   </a:moveTo>
                   <a:lnTo>
                     <a:pt x="0" y="0"/>
@@ -3496,7 +3496,7 @@
           </p:nvSpPr>
           <p:spPr>
             <a:xfrm>
-              <a:off x="3301571" y="3879610"/>
+              <a:off x="3303420" y="3877021"/>
               <a:ext cx="66150" cy="66150"/>
             </a:xfrm>
             <a:prstGeom prst="ellipse">
@@ -3531,7 +3531,7 @@
           </p:nvSpPr>
           <p:spPr>
             <a:xfrm>
-              <a:off x="3745878" y="3879610"/>
+              <a:off x="3747570" y="3877021"/>
               <a:ext cx="66150" cy="66150"/>
             </a:xfrm>
             <a:prstGeom prst="ellipse">
@@ -3566,7 +3566,7 @@
           </p:nvSpPr>
           <p:spPr>
             <a:xfrm>
-              <a:off x="2778857" y="3563558"/>
+              <a:off x="2780891" y="3561300"/>
               <a:ext cx="66150" cy="66150"/>
             </a:xfrm>
             <a:prstGeom prst="ellipse">
@@ -3601,7 +3601,7 @@
           </p:nvSpPr>
           <p:spPr>
             <a:xfrm>
-              <a:off x="4338287" y="3809376"/>
+              <a:off x="4339769" y="3806861"/>
               <a:ext cx="66150" cy="66150"/>
             </a:xfrm>
             <a:prstGeom prst="ellipse">
@@ -3636,7 +3636,7 @@
           </p:nvSpPr>
           <p:spPr>
             <a:xfrm>
-              <a:off x="4730322" y="4283453"/>
+              <a:off x="4731666" y="4280441"/>
               <a:ext cx="66150" cy="66150"/>
             </a:xfrm>
             <a:prstGeom prst="ellipse">
@@ -3671,7 +3671,7 @@
           </p:nvSpPr>
           <p:spPr>
             <a:xfrm>
-              <a:off x="4765170" y="4388804"/>
+              <a:off x="4766501" y="4385681"/>
               <a:ext cx="66150" cy="66150"/>
             </a:xfrm>
             <a:prstGeom prst="ellipse">
@@ -3706,7 +3706,7 @@
           </p:nvSpPr>
           <p:spPr>
             <a:xfrm>
-              <a:off x="4956832" y="5056024"/>
+              <a:off x="4958095" y="5052202"/>
               <a:ext cx="66150" cy="66150"/>
             </a:xfrm>
             <a:prstGeom prst="ellipse">
@@ -3741,7 +3741,7 @@
           </p:nvSpPr>
           <p:spPr>
             <a:xfrm>
-              <a:off x="4294728" y="3282623"/>
+              <a:off x="4296225" y="3280660"/>
               <a:ext cx="66150" cy="66150"/>
             </a:xfrm>
             <a:prstGeom prst="ellipse">
@@ -3776,7 +3776,7 @@
           </p:nvSpPr>
           <p:spPr>
             <a:xfrm>
-              <a:off x="4225032" y="3563558"/>
+              <a:off x="4226555" y="3561300"/>
               <a:ext cx="66150" cy="66150"/>
             </a:xfrm>
             <a:prstGeom prst="ellipse">
@@ -3811,7 +3811,7 @@
           </p:nvSpPr>
           <p:spPr>
             <a:xfrm>
-              <a:off x="4730322" y="4195661"/>
+              <a:off x="4731666" y="4192741"/>
               <a:ext cx="66150" cy="66150"/>
             </a:xfrm>
             <a:prstGeom prst="ellipse">
@@ -3846,7 +3846,7 @@
           </p:nvSpPr>
           <p:spPr>
             <a:xfrm>
-              <a:off x="4730322" y="4441479"/>
+              <a:off x="4731666" y="4438301"/>
               <a:ext cx="66150" cy="66150"/>
             </a:xfrm>
             <a:prstGeom prst="ellipse">
@@ -3881,7 +3881,7 @@
           </p:nvSpPr>
           <p:spPr>
             <a:xfrm>
-              <a:off x="5828021" y="4687297"/>
+              <a:off x="5828977" y="4683862"/>
               <a:ext cx="66150" cy="66150"/>
             </a:xfrm>
             <a:prstGeom prst="ellipse">
@@ -3916,7 +3916,7 @@
           </p:nvSpPr>
           <p:spPr>
             <a:xfrm>
-              <a:off x="5235612" y="4529271"/>
+              <a:off x="5236777" y="4526001"/>
               <a:ext cx="66150" cy="66150"/>
             </a:xfrm>
             <a:prstGeom prst="ellipse">
@@ -3951,7 +3951,7 @@
           </p:nvSpPr>
           <p:spPr>
             <a:xfrm>
-              <a:off x="5322731" y="4897998"/>
+              <a:off x="5323865" y="4894342"/>
               <a:ext cx="66150" cy="66150"/>
             </a:xfrm>
             <a:prstGeom prst="ellipse">
@@ -3986,7 +3986,7 @@
           </p:nvSpPr>
           <p:spPr>
             <a:xfrm>
-              <a:off x="7884029" y="5740802"/>
+              <a:off x="7884257" y="5736263"/>
               <a:ext cx="66150" cy="66150"/>
             </a:xfrm>
             <a:prstGeom prst="ellipse">
@@ -4021,7 +4021,7 @@
           </p:nvSpPr>
           <p:spPr>
             <a:xfrm>
-              <a:off x="8187203" y="5740802"/>
+              <a:off x="8187324" y="5736263"/>
               <a:ext cx="66150" cy="66150"/>
             </a:xfrm>
             <a:prstGeom prst="ellipse">
@@ -4056,7 +4056,7 @@
           </p:nvSpPr>
           <p:spPr>
             <a:xfrm>
-              <a:off x="8049555" y="4985790"/>
+              <a:off x="8049724" y="4982042"/>
               <a:ext cx="66150" cy="66150"/>
             </a:xfrm>
             <a:prstGeom prst="ellipse">
@@ -4091,7 +4091,7 @@
           </p:nvSpPr>
           <p:spPr>
             <a:xfrm>
-              <a:off x="2569772" y="1877950"/>
+              <a:off x="2571880" y="1877458"/>
               <a:ext cx="66150" cy="66150"/>
             </a:xfrm>
             <a:prstGeom prst="ellipse">
@@ -4126,7 +4126,7 @@
           </p:nvSpPr>
           <p:spPr>
             <a:xfrm>
-              <a:off x="1550480" y="2229119"/>
+              <a:off x="1552948" y="2228259"/>
               <a:ext cx="66150" cy="66150"/>
             </a:xfrm>
             <a:prstGeom prst="ellipse">
@@ -4161,7 +4161,7 @@
           </p:nvSpPr>
           <p:spPr>
             <a:xfrm>
-              <a:off x="1933803" y="1614574"/>
+              <a:off x="1936136" y="1614358"/>
               <a:ext cx="66150" cy="66150"/>
             </a:xfrm>
             <a:prstGeom prst="ellipse">
@@ -4196,7 +4196,7 @@
           </p:nvSpPr>
           <p:spPr>
             <a:xfrm>
-              <a:off x="3031502" y="3791818"/>
+              <a:off x="3033447" y="3789321"/>
               <a:ext cx="66150" cy="66150"/>
             </a:xfrm>
             <a:prstGeom prst="ellipse">
@@ -4231,7 +4231,7 @@
           </p:nvSpPr>
           <p:spPr>
             <a:xfrm>
-              <a:off x="4869713" y="4845323"/>
+              <a:off x="4871007" y="4841722"/>
               <a:ext cx="66150" cy="66150"/>
             </a:xfrm>
             <a:prstGeom prst="ellipse">
@@ -4266,7 +4266,7 @@
           </p:nvSpPr>
           <p:spPr>
             <a:xfrm>
-              <a:off x="4721610" y="4897998"/>
+              <a:off x="4722957" y="4894342"/>
               <a:ext cx="66150" cy="66150"/>
             </a:xfrm>
             <a:prstGeom prst="ellipse">
@@ -4301,7 +4301,7 @@
           </p:nvSpPr>
           <p:spPr>
             <a:xfrm>
-              <a:off x="5427274" y="5231608"/>
+              <a:off x="5428371" y="5227602"/>
               <a:ext cx="66150" cy="66150"/>
             </a:xfrm>
             <a:prstGeom prst="ellipse">
@@ -4336,7 +4336,7 @@
           </p:nvSpPr>
           <p:spPr>
             <a:xfrm>
-              <a:off x="5435986" y="4195661"/>
+              <a:off x="5437080" y="4192741"/>
               <a:ext cx="66150" cy="66150"/>
             </a:xfrm>
             <a:prstGeom prst="ellipse">
@@ -4371,7 +4371,7 @@
           </p:nvSpPr>
           <p:spPr>
             <a:xfrm>
-              <a:off x="2108041" y="2773429"/>
+              <a:off x="2110312" y="2771999"/>
               <a:ext cx="66150" cy="66150"/>
             </a:xfrm>
             <a:prstGeom prst="ellipse">
@@ -4406,7 +4406,7 @@
           </p:nvSpPr>
           <p:spPr>
             <a:xfrm>
-              <a:off x="2465229" y="3001689"/>
+              <a:off x="2467374" y="3000020"/>
               <a:ext cx="66150" cy="66150"/>
             </a:xfrm>
             <a:prstGeom prst="ellipse">
@@ -4441,7 +4441,7 @@
           </p:nvSpPr>
           <p:spPr>
             <a:xfrm>
-              <a:off x="1372757" y="2229119"/>
+              <a:off x="1375288" y="2228259"/>
               <a:ext cx="66150" cy="66150"/>
             </a:xfrm>
             <a:prstGeom prst="ellipse">
@@ -4476,7 +4476,7 @@
           </p:nvSpPr>
           <p:spPr>
             <a:xfrm>
-              <a:off x="4259880" y="4792647"/>
+              <a:off x="4261390" y="4789102"/>
               <a:ext cx="66150" cy="66150"/>
             </a:xfrm>
             <a:prstGeom prst="ellipse">
@@ -4511,7 +4511,7 @@
           </p:nvSpPr>
           <p:spPr>
             <a:xfrm>
-              <a:off x="3562928" y="4107869"/>
+              <a:off x="3564685" y="4105041"/>
               <a:ext cx="66150" cy="66150"/>
             </a:xfrm>
             <a:prstGeom prst="ellipse">
@@ -4546,7 +4546,7 @@
           </p:nvSpPr>
           <p:spPr>
             <a:xfrm>
-              <a:off x="4956832" y="4933115"/>
+              <a:off x="4958095" y="4929422"/>
               <a:ext cx="66150" cy="66150"/>
             </a:xfrm>
             <a:prstGeom prst="ellipse">
@@ -4581,7 +4581,7 @@
           </p:nvSpPr>
           <p:spPr>
             <a:xfrm>
-              <a:off x="3580352" y="3809376"/>
+              <a:off x="3582102" y="3806861"/>
               <a:ext cx="66150" cy="66150"/>
             </a:xfrm>
             <a:prstGeom prst="ellipse">
@@ -4616,7 +4616,7 @@
           </p:nvSpPr>
           <p:spPr>
             <a:xfrm>
-              <a:off x="872818" y="5804563"/>
+              <a:off x="875470" y="5799950"/>
               <a:ext cx="129661" cy="79095"/>
             </a:xfrm>
             <a:prstGeom prst="rect">
@@ -4662,7 +4662,7 @@
           </p:nvSpPr>
           <p:spPr>
             <a:xfrm>
-              <a:off x="872818" y="4926642"/>
+              <a:off x="875470" y="4922949"/>
               <a:ext cx="129661" cy="79095"/>
             </a:xfrm>
             <a:prstGeom prst="rect">
@@ -4708,7 +4708,7 @@
           </p:nvSpPr>
           <p:spPr>
             <a:xfrm>
-              <a:off x="872818" y="4048721"/>
+              <a:off x="875470" y="4045948"/>
               <a:ext cx="129661" cy="79095"/>
             </a:xfrm>
             <a:prstGeom prst="rect">
@@ -4754,7 +4754,7 @@
           </p:nvSpPr>
           <p:spPr>
             <a:xfrm>
-              <a:off x="872818" y="3170800"/>
+              <a:off x="875470" y="3168947"/>
               <a:ext cx="129661" cy="79095"/>
             </a:xfrm>
             <a:prstGeom prst="rect">
@@ -4800,7 +4800,7 @@
           </p:nvSpPr>
           <p:spPr>
             <a:xfrm>
-              <a:off x="872818" y="2292879"/>
+              <a:off x="875470" y="2291946"/>
               <a:ext cx="129661" cy="79095"/>
             </a:xfrm>
             <a:prstGeom prst="rect">
@@ -4846,7 +4846,7 @@
           </p:nvSpPr>
           <p:spPr>
             <a:xfrm>
-              <a:off x="872818" y="1414959"/>
+              <a:off x="875470" y="1414945"/>
               <a:ext cx="129661" cy="79095"/>
             </a:xfrm>
             <a:prstGeom prst="rect">
@@ -4892,7 +4892,7 @@
           </p:nvSpPr>
           <p:spPr>
             <a:xfrm>
-              <a:off x="1030315" y="5844110"/>
+              <a:off x="1032967" y="5839498"/>
               <a:ext cx="34794" cy="0"/>
             </a:xfrm>
             <a:custGeom>
@@ -4932,7 +4932,7 @@
           </p:nvSpPr>
           <p:spPr>
             <a:xfrm>
-              <a:off x="1030315" y="4966190"/>
+              <a:off x="1032967" y="4962497"/>
               <a:ext cx="34794" cy="0"/>
             </a:xfrm>
             <a:custGeom>
@@ -4972,7 +4972,7 @@
           </p:nvSpPr>
           <p:spPr>
             <a:xfrm>
-              <a:off x="1030315" y="4088269"/>
+              <a:off x="1032967" y="4085496"/>
               <a:ext cx="34794" cy="0"/>
             </a:xfrm>
             <a:custGeom>
@@ -5012,7 +5012,7 @@
           </p:nvSpPr>
           <p:spPr>
             <a:xfrm>
-              <a:off x="1030315" y="3210348"/>
+              <a:off x="1032967" y="3208495"/>
               <a:ext cx="34794" cy="0"/>
             </a:xfrm>
             <a:custGeom>
@@ -5052,7 +5052,7 @@
           </p:nvSpPr>
           <p:spPr>
             <a:xfrm>
-              <a:off x="1030315" y="2332427"/>
+              <a:off x="1032967" y="2331494"/>
               <a:ext cx="34794" cy="0"/>
             </a:xfrm>
             <a:custGeom>
@@ -5092,7 +5092,7 @@
           </p:nvSpPr>
           <p:spPr>
             <a:xfrm>
-              <a:off x="1030315" y="1454506"/>
+              <a:off x="1032967" y="1454493"/>
               <a:ext cx="34794" cy="0"/>
             </a:xfrm>
             <a:custGeom>
@@ -5132,7 +5132,7 @@
           </p:nvSpPr>
           <p:spPr>
             <a:xfrm>
-              <a:off x="2254371" y="5980188"/>
+              <a:off x="2256602" y="5975433"/>
               <a:ext cx="0" cy="34794"/>
             </a:xfrm>
             <a:custGeom>
@@ -5172,7 +5172,7 @@
           </p:nvSpPr>
           <p:spPr>
             <a:xfrm>
-              <a:off x="3996750" y="5980188"/>
+              <a:off x="3998365" y="5975433"/>
               <a:ext cx="0" cy="34794"/>
             </a:xfrm>
             <a:custGeom>
@@ -5212,7 +5212,7 @@
           </p:nvSpPr>
           <p:spPr>
             <a:xfrm>
-              <a:off x="5739130" y="5980188"/>
+              <a:off x="5740128" y="5975433"/>
               <a:ext cx="0" cy="34794"/>
             </a:xfrm>
             <a:custGeom>
@@ -5252,7 +5252,7 @@
           </p:nvSpPr>
           <p:spPr>
             <a:xfrm>
-              <a:off x="7481509" y="5980188"/>
+              <a:off x="7481891" y="5975433"/>
               <a:ext cx="0" cy="34794"/>
             </a:xfrm>
             <a:custGeom>
@@ -5292,7 +5292,7 @@
           </p:nvSpPr>
           <p:spPr>
             <a:xfrm>
-              <a:off x="2221956" y="6042818"/>
+              <a:off x="2224187" y="6038063"/>
               <a:ext cx="64830" cy="79095"/>
             </a:xfrm>
             <a:prstGeom prst="rect">
@@ -5338,7 +5338,7 @@
           </p:nvSpPr>
           <p:spPr>
             <a:xfrm>
-              <a:off x="3964335" y="6042818"/>
+              <a:off x="3965950" y="6038063"/>
               <a:ext cx="64830" cy="79095"/>
             </a:xfrm>
             <a:prstGeom prst="rect">
@@ -5384,7 +5384,7 @@
           </p:nvSpPr>
           <p:spPr>
             <a:xfrm>
-              <a:off x="5706714" y="6042818"/>
+              <a:off x="5707713" y="6038063"/>
               <a:ext cx="64830" cy="79095"/>
             </a:xfrm>
             <a:prstGeom prst="rect">
@@ -5430,7 +5430,7 @@
           </p:nvSpPr>
           <p:spPr>
             <a:xfrm>
-              <a:off x="7449094" y="6042818"/>
+              <a:off x="7449476" y="6038063"/>
               <a:ext cx="64830" cy="79095"/>
             </a:xfrm>
             <a:prstGeom prst="rect">
@@ -5476,7 +5476,7 @@
           </p:nvSpPr>
           <p:spPr>
             <a:xfrm>
-              <a:off x="4738806" y="6181489"/>
+              <a:off x="4740132" y="6178837"/>
               <a:ext cx="148498" cy="98938"/>
             </a:xfrm>
             <a:prstGeom prst="rect">
@@ -5522,7 +5522,7 @@
           </p:nvSpPr>
           <p:spPr>
             <a:xfrm rot="-5400000">
-              <a:off x="607457" y="3661294"/>
+              <a:off x="607457" y="3658916"/>
               <a:ext cx="300380" cy="98938"/>
             </a:xfrm>
             <a:prstGeom prst="rect">

--- a/tests/testthat/temp_fullslide_43.pptx
+++ b/tests/testthat/temp_fullslide_43.pptx
@@ -2610,8 +2610,8 @@
           </p:nvSpPr>
           <p:spPr>
             <a:xfrm>
-              <a:off x="1067762" y="1441338"/>
-              <a:ext cx="7493238" cy="4534095"/>
+              <a:off x="1065110" y="1441338"/>
+              <a:ext cx="7495890" cy="4538850"/>
             </a:xfrm>
             <a:prstGeom prst="rect">
               <a:avLst/>
@@ -2636,21 +2636,21 @@
           </p:nvSpPr>
           <p:spPr>
             <a:xfrm>
-              <a:off x="1067762" y="5400998"/>
-              <a:ext cx="7493238" cy="0"/>
+              <a:off x="1065110" y="5405150"/>
+              <a:ext cx="7495890" cy="0"/>
             </a:xfrm>
             <a:custGeom>
               <a:avLst/>
               <a:pathLst>
-                <a:path w="7493238" h="0">
+                <a:path w="7495890" h="0">
                   <a:moveTo>
                     <a:pt x="0" y="0"/>
                   </a:moveTo>
                   <a:lnTo>
-                    <a:pt x="7493238" y="0"/>
+                    <a:pt x="7495890" y="0"/>
                   </a:lnTo>
                   <a:lnTo>
-                    <a:pt x="7493238" y="0"/>
+                    <a:pt x="7495890" y="0"/>
                   </a:lnTo>
                 </a:path>
               </a:pathLst>
@@ -2679,21 +2679,21 @@
           </p:nvSpPr>
           <p:spPr>
             <a:xfrm>
-              <a:off x="1067762" y="4523996"/>
-              <a:ext cx="7493238" cy="0"/>
+              <a:off x="1065110" y="4527229"/>
+              <a:ext cx="7495890" cy="0"/>
             </a:xfrm>
             <a:custGeom>
               <a:avLst/>
               <a:pathLst>
-                <a:path w="7493238" h="0">
+                <a:path w="7495890" h="0">
                   <a:moveTo>
                     <a:pt x="0" y="0"/>
                   </a:moveTo>
                   <a:lnTo>
-                    <a:pt x="7493238" y="0"/>
+                    <a:pt x="7495890" y="0"/>
                   </a:lnTo>
                   <a:lnTo>
-                    <a:pt x="7493238" y="0"/>
+                    <a:pt x="7495890" y="0"/>
                   </a:lnTo>
                 </a:path>
               </a:pathLst>
@@ -2722,21 +2722,21 @@
           </p:nvSpPr>
           <p:spPr>
             <a:xfrm>
-              <a:off x="1067762" y="3646995"/>
-              <a:ext cx="7493238" cy="0"/>
+              <a:off x="1065110" y="3649308"/>
+              <a:ext cx="7495890" cy="0"/>
             </a:xfrm>
             <a:custGeom>
               <a:avLst/>
               <a:pathLst>
-                <a:path w="7493238" h="0">
+                <a:path w="7495890" h="0">
                   <a:moveTo>
                     <a:pt x="0" y="0"/>
                   </a:moveTo>
                   <a:lnTo>
-                    <a:pt x="7493238" y="0"/>
+                    <a:pt x="7495890" y="0"/>
                   </a:lnTo>
                   <a:lnTo>
-                    <a:pt x="7493238" y="0"/>
+                    <a:pt x="7495890" y="0"/>
                   </a:lnTo>
                 </a:path>
               </a:pathLst>
@@ -2765,21 +2765,21 @@
           </p:nvSpPr>
           <p:spPr>
             <a:xfrm>
-              <a:off x="1067762" y="2769994"/>
-              <a:ext cx="7493238" cy="0"/>
+              <a:off x="1065110" y="2771388"/>
+              <a:ext cx="7495890" cy="0"/>
             </a:xfrm>
             <a:custGeom>
               <a:avLst/>
               <a:pathLst>
-                <a:path w="7493238" h="0">
+                <a:path w="7495890" h="0">
                   <a:moveTo>
                     <a:pt x="0" y="0"/>
                   </a:moveTo>
                   <a:lnTo>
-                    <a:pt x="7493238" y="0"/>
+                    <a:pt x="7495890" y="0"/>
                   </a:lnTo>
                   <a:lnTo>
-                    <a:pt x="7493238" y="0"/>
+                    <a:pt x="7495890" y="0"/>
                   </a:lnTo>
                 </a:path>
               </a:pathLst>
@@ -2808,21 +2808,21 @@
           </p:nvSpPr>
           <p:spPr>
             <a:xfrm>
-              <a:off x="1067762" y="1892993"/>
-              <a:ext cx="7493238" cy="0"/>
+              <a:off x="1065110" y="1893467"/>
+              <a:ext cx="7495890" cy="0"/>
             </a:xfrm>
             <a:custGeom>
               <a:avLst/>
               <a:pathLst>
-                <a:path w="7493238" h="0">
+                <a:path w="7495890" h="0">
                   <a:moveTo>
                     <a:pt x="0" y="0"/>
                   </a:moveTo>
                   <a:lnTo>
-                    <a:pt x="7493238" y="0"/>
+                    <a:pt x="7495890" y="0"/>
                   </a:lnTo>
                   <a:lnTo>
-                    <a:pt x="7493238" y="0"/>
+                    <a:pt x="7495890" y="0"/>
                   </a:lnTo>
                 </a:path>
               </a:pathLst>
@@ -2851,15 +2851,15 @@
           </p:nvSpPr>
           <p:spPr>
             <a:xfrm>
-              <a:off x="1385721" y="1441338"/>
-              <a:ext cx="0" cy="4534095"/>
+              <a:off x="1383181" y="1441338"/>
+              <a:ext cx="0" cy="4538850"/>
             </a:xfrm>
             <a:custGeom>
               <a:avLst/>
               <a:pathLst>
-                <a:path w="0" h="4534095">
+                <a:path w="0" h="4538850">
                   <a:moveTo>
-                    <a:pt x="0" y="4534095"/>
+                    <a:pt x="0" y="4538850"/>
                   </a:moveTo>
                   <a:lnTo>
                     <a:pt x="0" y="0"/>
@@ -2894,15 +2894,15 @@
           </p:nvSpPr>
           <p:spPr>
             <a:xfrm>
-              <a:off x="3127484" y="1441338"/>
-              <a:ext cx="0" cy="4534095"/>
+              <a:off x="3125561" y="1441338"/>
+              <a:ext cx="0" cy="4538850"/>
             </a:xfrm>
             <a:custGeom>
               <a:avLst/>
               <a:pathLst>
-                <a:path w="0" h="4534095">
+                <a:path w="0" h="4538850">
                   <a:moveTo>
-                    <a:pt x="0" y="4534095"/>
+                    <a:pt x="0" y="4538850"/>
                   </a:moveTo>
                   <a:lnTo>
                     <a:pt x="0" y="0"/>
@@ -2937,15 +2937,15 @@
           </p:nvSpPr>
           <p:spPr>
             <a:xfrm>
-              <a:off x="4869247" y="1441338"/>
-              <a:ext cx="0" cy="4534095"/>
+              <a:off x="4867940" y="1441338"/>
+              <a:ext cx="0" cy="4538850"/>
             </a:xfrm>
             <a:custGeom>
               <a:avLst/>
               <a:pathLst>
-                <a:path w="0" h="4534095">
+                <a:path w="0" h="4538850">
                   <a:moveTo>
-                    <a:pt x="0" y="4534095"/>
+                    <a:pt x="0" y="4538850"/>
                   </a:moveTo>
                   <a:lnTo>
                     <a:pt x="0" y="0"/>
@@ -2980,15 +2980,15 @@
           </p:nvSpPr>
           <p:spPr>
             <a:xfrm>
-              <a:off x="6611010" y="1441338"/>
-              <a:ext cx="0" cy="4534095"/>
+              <a:off x="6610320" y="1441338"/>
+              <a:ext cx="0" cy="4538850"/>
             </a:xfrm>
             <a:custGeom>
               <a:avLst/>
               <a:pathLst>
-                <a:path w="0" h="4534095">
+                <a:path w="0" h="4538850">
                   <a:moveTo>
-                    <a:pt x="0" y="4534095"/>
+                    <a:pt x="0" y="4538850"/>
                   </a:moveTo>
                   <a:lnTo>
                     <a:pt x="0" y="0"/>
@@ -3023,15 +3023,15 @@
           </p:nvSpPr>
           <p:spPr>
             <a:xfrm>
-              <a:off x="8352773" y="1441338"/>
-              <a:ext cx="0" cy="4534095"/>
+              <a:off x="8352699" y="1441338"/>
+              <a:ext cx="0" cy="4538850"/>
             </a:xfrm>
             <a:custGeom>
               <a:avLst/>
               <a:pathLst>
-                <a:path w="0" h="4534095">
+                <a:path w="0" h="4538850">
                   <a:moveTo>
-                    <a:pt x="0" y="4534095"/>
+                    <a:pt x="0" y="4538850"/>
                   </a:moveTo>
                   <a:lnTo>
                     <a:pt x="0" y="0"/>
@@ -3066,21 +3066,21 @@
           </p:nvSpPr>
           <p:spPr>
             <a:xfrm>
-              <a:off x="1067762" y="5839498"/>
-              <a:ext cx="7493238" cy="0"/>
+              <a:off x="1065110" y="5844110"/>
+              <a:ext cx="7495890" cy="0"/>
             </a:xfrm>
             <a:custGeom>
               <a:avLst/>
               <a:pathLst>
-                <a:path w="7493238" h="0">
+                <a:path w="7495890" h="0">
                   <a:moveTo>
                     <a:pt x="0" y="0"/>
                   </a:moveTo>
                   <a:lnTo>
-                    <a:pt x="7493238" y="0"/>
+                    <a:pt x="7495890" y="0"/>
                   </a:lnTo>
                   <a:lnTo>
-                    <a:pt x="7493238" y="0"/>
+                    <a:pt x="7495890" y="0"/>
                   </a:lnTo>
                 </a:path>
               </a:pathLst>
@@ -3109,21 +3109,21 @@
           </p:nvSpPr>
           <p:spPr>
             <a:xfrm>
-              <a:off x="1067762" y="4962497"/>
-              <a:ext cx="7493238" cy="0"/>
+              <a:off x="1065110" y="4966190"/>
+              <a:ext cx="7495890" cy="0"/>
             </a:xfrm>
             <a:custGeom>
               <a:avLst/>
               <a:pathLst>
-                <a:path w="7493238" h="0">
+                <a:path w="7495890" h="0">
                   <a:moveTo>
                     <a:pt x="0" y="0"/>
                   </a:moveTo>
                   <a:lnTo>
-                    <a:pt x="7493238" y="0"/>
+                    <a:pt x="7495890" y="0"/>
                   </a:lnTo>
                   <a:lnTo>
-                    <a:pt x="7493238" y="0"/>
+                    <a:pt x="7495890" y="0"/>
                   </a:lnTo>
                 </a:path>
               </a:pathLst>
@@ -3152,21 +3152,21 @@
           </p:nvSpPr>
           <p:spPr>
             <a:xfrm>
-              <a:off x="1067762" y="4085496"/>
-              <a:ext cx="7493238" cy="0"/>
+              <a:off x="1065110" y="4088269"/>
+              <a:ext cx="7495890" cy="0"/>
             </a:xfrm>
             <a:custGeom>
               <a:avLst/>
               <a:pathLst>
-                <a:path w="7493238" h="0">
+                <a:path w="7495890" h="0">
                   <a:moveTo>
                     <a:pt x="0" y="0"/>
                   </a:moveTo>
                   <a:lnTo>
-                    <a:pt x="7493238" y="0"/>
+                    <a:pt x="7495890" y="0"/>
                   </a:lnTo>
                   <a:lnTo>
-                    <a:pt x="7493238" y="0"/>
+                    <a:pt x="7495890" y="0"/>
                   </a:lnTo>
                 </a:path>
               </a:pathLst>
@@ -3195,21 +3195,21 @@
           </p:nvSpPr>
           <p:spPr>
             <a:xfrm>
-              <a:off x="1067762" y="3208495"/>
-              <a:ext cx="7493238" cy="0"/>
+              <a:off x="1065110" y="3210348"/>
+              <a:ext cx="7495890" cy="0"/>
             </a:xfrm>
             <a:custGeom>
               <a:avLst/>
               <a:pathLst>
-                <a:path w="7493238" h="0">
+                <a:path w="7495890" h="0">
                   <a:moveTo>
                     <a:pt x="0" y="0"/>
                   </a:moveTo>
                   <a:lnTo>
-                    <a:pt x="7493238" y="0"/>
+                    <a:pt x="7495890" y="0"/>
                   </a:lnTo>
                   <a:lnTo>
-                    <a:pt x="7493238" y="0"/>
+                    <a:pt x="7495890" y="0"/>
                   </a:lnTo>
                 </a:path>
               </a:pathLst>
@@ -3238,21 +3238,21 @@
           </p:nvSpPr>
           <p:spPr>
             <a:xfrm>
-              <a:off x="1067762" y="2331494"/>
-              <a:ext cx="7493238" cy="0"/>
+              <a:off x="1065110" y="2332427"/>
+              <a:ext cx="7495890" cy="0"/>
             </a:xfrm>
             <a:custGeom>
               <a:avLst/>
               <a:pathLst>
-                <a:path w="7493238" h="0">
+                <a:path w="7495890" h="0">
                   <a:moveTo>
                     <a:pt x="0" y="0"/>
                   </a:moveTo>
                   <a:lnTo>
-                    <a:pt x="7493238" y="0"/>
+                    <a:pt x="7495890" y="0"/>
                   </a:lnTo>
                   <a:lnTo>
-                    <a:pt x="7493238" y="0"/>
+                    <a:pt x="7495890" y="0"/>
                   </a:lnTo>
                 </a:path>
               </a:pathLst>
@@ -3281,21 +3281,21 @@
           </p:nvSpPr>
           <p:spPr>
             <a:xfrm>
-              <a:off x="1067762" y="1454493"/>
-              <a:ext cx="7493238" cy="0"/>
+              <a:off x="1065110" y="1454506"/>
+              <a:ext cx="7495890" cy="0"/>
             </a:xfrm>
             <a:custGeom>
               <a:avLst/>
               <a:pathLst>
-                <a:path w="7493238" h="0">
+                <a:path w="7495890" h="0">
                   <a:moveTo>
                     <a:pt x="0" y="0"/>
                   </a:moveTo>
                   <a:lnTo>
-                    <a:pt x="7493238" y="0"/>
+                    <a:pt x="7495890" y="0"/>
                   </a:lnTo>
                   <a:lnTo>
-                    <a:pt x="7493238" y="0"/>
+                    <a:pt x="7495890" y="0"/>
                   </a:lnTo>
                 </a:path>
               </a:pathLst>
@@ -3324,15 +3324,15 @@
           </p:nvSpPr>
           <p:spPr>
             <a:xfrm>
-              <a:off x="2256602" y="1441338"/>
-              <a:ext cx="0" cy="4534095"/>
+              <a:off x="2254371" y="1441338"/>
+              <a:ext cx="0" cy="4538850"/>
             </a:xfrm>
             <a:custGeom>
               <a:avLst/>
               <a:pathLst>
-                <a:path w="0" h="4534095">
+                <a:path w="0" h="4538850">
                   <a:moveTo>
-                    <a:pt x="0" y="4534095"/>
+                    <a:pt x="0" y="4538850"/>
                   </a:moveTo>
                   <a:lnTo>
                     <a:pt x="0" y="0"/>
@@ -3367,15 +3367,15 @@
           </p:nvSpPr>
           <p:spPr>
             <a:xfrm>
-              <a:off x="3998365" y="1441338"/>
-              <a:ext cx="0" cy="4534095"/>
+              <a:off x="3996750" y="1441338"/>
+              <a:ext cx="0" cy="4538850"/>
             </a:xfrm>
             <a:custGeom>
               <a:avLst/>
               <a:pathLst>
-                <a:path w="0" h="4534095">
+                <a:path w="0" h="4538850">
                   <a:moveTo>
-                    <a:pt x="0" y="4534095"/>
+                    <a:pt x="0" y="4538850"/>
                   </a:moveTo>
                   <a:lnTo>
                     <a:pt x="0" y="0"/>
@@ -3410,15 +3410,15 @@
           </p:nvSpPr>
           <p:spPr>
             <a:xfrm>
-              <a:off x="5740128" y="1441338"/>
-              <a:ext cx="0" cy="4534095"/>
+              <a:off x="5739130" y="1441338"/>
+              <a:ext cx="0" cy="4538850"/>
             </a:xfrm>
             <a:custGeom>
               <a:avLst/>
               <a:pathLst>
-                <a:path w="0" h="4534095">
+                <a:path w="0" h="4538850">
                   <a:moveTo>
-                    <a:pt x="0" y="4534095"/>
+                    <a:pt x="0" y="4538850"/>
                   </a:moveTo>
                   <a:lnTo>
                     <a:pt x="0" y="0"/>
@@ -3453,15 +3453,15 @@
           </p:nvSpPr>
           <p:spPr>
             <a:xfrm>
-              <a:off x="7481891" y="1441338"/>
-              <a:ext cx="0" cy="4534095"/>
+              <a:off x="7481509" y="1441338"/>
+              <a:ext cx="0" cy="4538850"/>
             </a:xfrm>
             <a:custGeom>
               <a:avLst/>
               <a:pathLst>
-                <a:path w="0" h="4534095">
+                <a:path w="0" h="4538850">
                   <a:moveTo>
-                    <a:pt x="0" y="4534095"/>
+                    <a:pt x="0" y="4538850"/>
                   </a:moveTo>
                   <a:lnTo>
                     <a:pt x="0" y="0"/>
@@ -3496,7 +3496,7 @@
           </p:nvSpPr>
           <p:spPr>
             <a:xfrm>
-              <a:off x="3303420" y="3877021"/>
+              <a:off x="3301571" y="3879610"/>
               <a:ext cx="66150" cy="66150"/>
             </a:xfrm>
             <a:prstGeom prst="ellipse">
@@ -3531,7 +3531,7 @@
           </p:nvSpPr>
           <p:spPr>
             <a:xfrm>
-              <a:off x="3747570" y="3877021"/>
+              <a:off x="3745878" y="3879610"/>
               <a:ext cx="66150" cy="66150"/>
             </a:xfrm>
             <a:prstGeom prst="ellipse">
@@ -3566,7 +3566,7 @@
           </p:nvSpPr>
           <p:spPr>
             <a:xfrm>
-              <a:off x="2780891" y="3561300"/>
+              <a:off x="2778857" y="3563558"/>
               <a:ext cx="66150" cy="66150"/>
             </a:xfrm>
             <a:prstGeom prst="ellipse">
@@ -3601,7 +3601,7 @@
           </p:nvSpPr>
           <p:spPr>
             <a:xfrm>
-              <a:off x="4339769" y="3806861"/>
+              <a:off x="4338287" y="3809376"/>
               <a:ext cx="66150" cy="66150"/>
             </a:xfrm>
             <a:prstGeom prst="ellipse">
@@ -3636,7 +3636,7 @@
           </p:nvSpPr>
           <p:spPr>
             <a:xfrm>
-              <a:off x="4731666" y="4280441"/>
+              <a:off x="4730322" y="4283453"/>
               <a:ext cx="66150" cy="66150"/>
             </a:xfrm>
             <a:prstGeom prst="ellipse">
@@ -3671,7 +3671,7 @@
           </p:nvSpPr>
           <p:spPr>
             <a:xfrm>
-              <a:off x="4766501" y="4385681"/>
+              <a:off x="4765170" y="4388804"/>
               <a:ext cx="66150" cy="66150"/>
             </a:xfrm>
             <a:prstGeom prst="ellipse">
@@ -3706,7 +3706,7 @@
           </p:nvSpPr>
           <p:spPr>
             <a:xfrm>
-              <a:off x="4958095" y="5052202"/>
+              <a:off x="4956832" y="5056024"/>
               <a:ext cx="66150" cy="66150"/>
             </a:xfrm>
             <a:prstGeom prst="ellipse">
@@ -3741,7 +3741,7 @@
           </p:nvSpPr>
           <p:spPr>
             <a:xfrm>
-              <a:off x="4296225" y="3280660"/>
+              <a:off x="4294728" y="3282623"/>
               <a:ext cx="66150" cy="66150"/>
             </a:xfrm>
             <a:prstGeom prst="ellipse">
@@ -3776,7 +3776,7 @@
           </p:nvSpPr>
           <p:spPr>
             <a:xfrm>
-              <a:off x="4226555" y="3561300"/>
+              <a:off x="4225032" y="3563558"/>
               <a:ext cx="66150" cy="66150"/>
             </a:xfrm>
             <a:prstGeom prst="ellipse">
@@ -3811,7 +3811,7 @@
           </p:nvSpPr>
           <p:spPr>
             <a:xfrm>
-              <a:off x="4731666" y="4192741"/>
+              <a:off x="4730322" y="4195661"/>
               <a:ext cx="66150" cy="66150"/>
             </a:xfrm>
             <a:prstGeom prst="ellipse">
@@ -3846,7 +3846,7 @@
           </p:nvSpPr>
           <p:spPr>
             <a:xfrm>
-              <a:off x="4731666" y="4438301"/>
+              <a:off x="4730322" y="4441479"/>
               <a:ext cx="66150" cy="66150"/>
             </a:xfrm>
             <a:prstGeom prst="ellipse">
@@ -3881,7 +3881,7 @@
           </p:nvSpPr>
           <p:spPr>
             <a:xfrm>
-              <a:off x="5828977" y="4683862"/>
+              <a:off x="5828021" y="4687297"/>
               <a:ext cx="66150" cy="66150"/>
             </a:xfrm>
             <a:prstGeom prst="ellipse">
@@ -3916,7 +3916,7 @@
           </p:nvSpPr>
           <p:spPr>
             <a:xfrm>
-              <a:off x="5236777" y="4526001"/>
+              <a:off x="5235612" y="4529271"/>
               <a:ext cx="66150" cy="66150"/>
             </a:xfrm>
             <a:prstGeom prst="ellipse">
@@ -3951,7 +3951,7 @@
           </p:nvSpPr>
           <p:spPr>
             <a:xfrm>
-              <a:off x="5323865" y="4894342"/>
+              <a:off x="5322731" y="4897998"/>
               <a:ext cx="66150" cy="66150"/>
             </a:xfrm>
             <a:prstGeom prst="ellipse">
@@ -3986,7 +3986,7 @@
           </p:nvSpPr>
           <p:spPr>
             <a:xfrm>
-              <a:off x="7884257" y="5736263"/>
+              <a:off x="7884029" y="5740802"/>
               <a:ext cx="66150" cy="66150"/>
             </a:xfrm>
             <a:prstGeom prst="ellipse">
@@ -4021,7 +4021,7 @@
           </p:nvSpPr>
           <p:spPr>
             <a:xfrm>
-              <a:off x="8187324" y="5736263"/>
+              <a:off x="8187203" y="5740802"/>
               <a:ext cx="66150" cy="66150"/>
             </a:xfrm>
             <a:prstGeom prst="ellipse">
@@ -4056,7 +4056,7 @@
           </p:nvSpPr>
           <p:spPr>
             <a:xfrm>
-              <a:off x="8049724" y="4982042"/>
+              <a:off x="8049555" y="4985790"/>
               <a:ext cx="66150" cy="66150"/>
             </a:xfrm>
             <a:prstGeom prst="ellipse">
@@ -4091,7 +4091,7 @@
           </p:nvSpPr>
           <p:spPr>
             <a:xfrm>
-              <a:off x="2571880" y="1877458"/>
+              <a:off x="2569772" y="1877950"/>
               <a:ext cx="66150" cy="66150"/>
             </a:xfrm>
             <a:prstGeom prst="ellipse">
@@ -4126,7 +4126,7 @@
           </p:nvSpPr>
           <p:spPr>
             <a:xfrm>
-              <a:off x="1552948" y="2228259"/>
+              <a:off x="1550480" y="2229119"/>
               <a:ext cx="66150" cy="66150"/>
             </a:xfrm>
             <a:prstGeom prst="ellipse">
@@ -4161,7 +4161,7 @@
           </p:nvSpPr>
           <p:spPr>
             <a:xfrm>
-              <a:off x="1936136" y="1614358"/>
+              <a:off x="1933803" y="1614574"/>
               <a:ext cx="66150" cy="66150"/>
             </a:xfrm>
             <a:prstGeom prst="ellipse">
@@ -4196,7 +4196,7 @@
           </p:nvSpPr>
           <p:spPr>
             <a:xfrm>
-              <a:off x="3033447" y="3789321"/>
+              <a:off x="3031502" y="3791818"/>
               <a:ext cx="66150" cy="66150"/>
             </a:xfrm>
             <a:prstGeom prst="ellipse">
@@ -4231,7 +4231,7 @@
           </p:nvSpPr>
           <p:spPr>
             <a:xfrm>
-              <a:off x="4871007" y="4841722"/>
+              <a:off x="4869713" y="4845323"/>
               <a:ext cx="66150" cy="66150"/>
             </a:xfrm>
             <a:prstGeom prst="ellipse">
@@ -4266,7 +4266,7 @@
           </p:nvSpPr>
           <p:spPr>
             <a:xfrm>
-              <a:off x="4722957" y="4894342"/>
+              <a:off x="4721610" y="4897998"/>
               <a:ext cx="66150" cy="66150"/>
             </a:xfrm>
             <a:prstGeom prst="ellipse">
@@ -4301,7 +4301,7 @@
           </p:nvSpPr>
           <p:spPr>
             <a:xfrm>
-              <a:off x="5428371" y="5227602"/>
+              <a:off x="5427274" y="5231608"/>
               <a:ext cx="66150" cy="66150"/>
             </a:xfrm>
             <a:prstGeom prst="ellipse">
@@ -4336,7 +4336,7 @@
           </p:nvSpPr>
           <p:spPr>
             <a:xfrm>
-              <a:off x="5437080" y="4192741"/>
+              <a:off x="5435986" y="4195661"/>
               <a:ext cx="66150" cy="66150"/>
             </a:xfrm>
             <a:prstGeom prst="ellipse">
@@ -4371,7 +4371,7 @@
           </p:nvSpPr>
           <p:spPr>
             <a:xfrm>
-              <a:off x="2110312" y="2771999"/>
+              <a:off x="2108041" y="2773429"/>
               <a:ext cx="66150" cy="66150"/>
             </a:xfrm>
             <a:prstGeom prst="ellipse">
@@ -4406,7 +4406,7 @@
           </p:nvSpPr>
           <p:spPr>
             <a:xfrm>
-              <a:off x="2467374" y="3000020"/>
+              <a:off x="2465229" y="3001689"/>
               <a:ext cx="66150" cy="66150"/>
             </a:xfrm>
             <a:prstGeom prst="ellipse">
@@ -4441,7 +4441,7 @@
           </p:nvSpPr>
           <p:spPr>
             <a:xfrm>
-              <a:off x="1375288" y="2228259"/>
+              <a:off x="1372757" y="2229119"/>
               <a:ext cx="66150" cy="66150"/>
             </a:xfrm>
             <a:prstGeom prst="ellipse">
@@ -4476,7 +4476,7 @@
           </p:nvSpPr>
           <p:spPr>
             <a:xfrm>
-              <a:off x="4261390" y="4789102"/>
+              <a:off x="4259880" y="4792647"/>
               <a:ext cx="66150" cy="66150"/>
             </a:xfrm>
             <a:prstGeom prst="ellipse">
@@ -4511,7 +4511,7 @@
           </p:nvSpPr>
           <p:spPr>
             <a:xfrm>
-              <a:off x="3564685" y="4105041"/>
+              <a:off x="3562928" y="4107869"/>
               <a:ext cx="66150" cy="66150"/>
             </a:xfrm>
             <a:prstGeom prst="ellipse">
@@ -4546,7 +4546,7 @@
           </p:nvSpPr>
           <p:spPr>
             <a:xfrm>
-              <a:off x="4958095" y="4929422"/>
+              <a:off x="4956832" y="4933115"/>
               <a:ext cx="66150" cy="66150"/>
             </a:xfrm>
             <a:prstGeom prst="ellipse">
@@ -4581,7 +4581,7 @@
           </p:nvSpPr>
           <p:spPr>
             <a:xfrm>
-              <a:off x="3582102" y="3806861"/>
+              <a:off x="3580352" y="3809376"/>
               <a:ext cx="66150" cy="66150"/>
             </a:xfrm>
             <a:prstGeom prst="ellipse">
@@ -4616,7 +4616,7 @@
           </p:nvSpPr>
           <p:spPr>
             <a:xfrm>
-              <a:off x="875470" y="5799950"/>
+              <a:off x="872818" y="5804563"/>
               <a:ext cx="129661" cy="79095"/>
             </a:xfrm>
             <a:prstGeom prst="rect">
@@ -4662,7 +4662,7 @@
           </p:nvSpPr>
           <p:spPr>
             <a:xfrm>
-              <a:off x="875470" y="4922949"/>
+              <a:off x="872818" y="4926642"/>
               <a:ext cx="129661" cy="79095"/>
             </a:xfrm>
             <a:prstGeom prst="rect">
@@ -4708,7 +4708,7 @@
           </p:nvSpPr>
           <p:spPr>
             <a:xfrm>
-              <a:off x="875470" y="4045948"/>
+              <a:off x="872818" y="4048721"/>
               <a:ext cx="129661" cy="79095"/>
             </a:xfrm>
             <a:prstGeom prst="rect">
@@ -4754,7 +4754,7 @@
           </p:nvSpPr>
           <p:spPr>
             <a:xfrm>
-              <a:off x="875470" y="3168947"/>
+              <a:off x="872818" y="3170800"/>
               <a:ext cx="129661" cy="79095"/>
             </a:xfrm>
             <a:prstGeom prst="rect">
@@ -4800,7 +4800,7 @@
           </p:nvSpPr>
           <p:spPr>
             <a:xfrm>
-              <a:off x="875470" y="2291946"/>
+              <a:off x="872818" y="2292879"/>
               <a:ext cx="129661" cy="79095"/>
             </a:xfrm>
             <a:prstGeom prst="rect">
@@ -4846,7 +4846,7 @@
           </p:nvSpPr>
           <p:spPr>
             <a:xfrm>
-              <a:off x="875470" y="1414945"/>
+              <a:off x="872818" y="1414959"/>
               <a:ext cx="129661" cy="79095"/>
             </a:xfrm>
             <a:prstGeom prst="rect">
@@ -4892,7 +4892,7 @@
           </p:nvSpPr>
           <p:spPr>
             <a:xfrm>
-              <a:off x="1032967" y="5839498"/>
+              <a:off x="1030315" y="5844110"/>
               <a:ext cx="34794" cy="0"/>
             </a:xfrm>
             <a:custGeom>
@@ -4932,7 +4932,7 @@
           </p:nvSpPr>
           <p:spPr>
             <a:xfrm>
-              <a:off x="1032967" y="4962497"/>
+              <a:off x="1030315" y="4966190"/>
               <a:ext cx="34794" cy="0"/>
             </a:xfrm>
             <a:custGeom>
@@ -4972,7 +4972,7 @@
           </p:nvSpPr>
           <p:spPr>
             <a:xfrm>
-              <a:off x="1032967" y="4085496"/>
+              <a:off x="1030315" y="4088269"/>
               <a:ext cx="34794" cy="0"/>
             </a:xfrm>
             <a:custGeom>
@@ -5012,7 +5012,7 @@
           </p:nvSpPr>
           <p:spPr>
             <a:xfrm>
-              <a:off x="1032967" y="3208495"/>
+              <a:off x="1030315" y="3210348"/>
               <a:ext cx="34794" cy="0"/>
             </a:xfrm>
             <a:custGeom>
@@ -5052,7 +5052,7 @@
           </p:nvSpPr>
           <p:spPr>
             <a:xfrm>
-              <a:off x="1032967" y="2331494"/>
+              <a:off x="1030315" y="2332427"/>
               <a:ext cx="34794" cy="0"/>
             </a:xfrm>
             <a:custGeom>
@@ -5092,7 +5092,7 @@
           </p:nvSpPr>
           <p:spPr>
             <a:xfrm>
-              <a:off x="1032967" y="1454493"/>
+              <a:off x="1030315" y="1454506"/>
               <a:ext cx="34794" cy="0"/>
             </a:xfrm>
             <a:custGeom>
@@ -5132,7 +5132,7 @@
           </p:nvSpPr>
           <p:spPr>
             <a:xfrm>
-              <a:off x="2256602" y="5975433"/>
+              <a:off x="2254371" y="5980188"/>
               <a:ext cx="0" cy="34794"/>
             </a:xfrm>
             <a:custGeom>
@@ -5172,7 +5172,7 @@
           </p:nvSpPr>
           <p:spPr>
             <a:xfrm>
-              <a:off x="3998365" y="5975433"/>
+              <a:off x="3996750" y="5980188"/>
               <a:ext cx="0" cy="34794"/>
             </a:xfrm>
             <a:custGeom>
@@ -5212,7 +5212,7 @@
           </p:nvSpPr>
           <p:spPr>
             <a:xfrm>
-              <a:off x="5740128" y="5975433"/>
+              <a:off x="5739130" y="5980188"/>
               <a:ext cx="0" cy="34794"/>
             </a:xfrm>
             <a:custGeom>
@@ -5252,7 +5252,7 @@
           </p:nvSpPr>
           <p:spPr>
             <a:xfrm>
-              <a:off x="7481891" y="5975433"/>
+              <a:off x="7481509" y="5980188"/>
               <a:ext cx="0" cy="34794"/>
             </a:xfrm>
             <a:custGeom>
@@ -5292,7 +5292,7 @@
           </p:nvSpPr>
           <p:spPr>
             <a:xfrm>
-              <a:off x="2224187" y="6038063"/>
+              <a:off x="2221956" y="6042818"/>
               <a:ext cx="64830" cy="79095"/>
             </a:xfrm>
             <a:prstGeom prst="rect">
@@ -5338,7 +5338,7 @@
           </p:nvSpPr>
           <p:spPr>
             <a:xfrm>
-              <a:off x="3965950" y="6038063"/>
+              <a:off x="3964335" y="6042818"/>
               <a:ext cx="64830" cy="79095"/>
             </a:xfrm>
             <a:prstGeom prst="rect">
@@ -5384,7 +5384,7 @@
           </p:nvSpPr>
           <p:spPr>
             <a:xfrm>
-              <a:off x="5707713" y="6038063"/>
+              <a:off x="5706714" y="6042818"/>
               <a:ext cx="64830" cy="79095"/>
             </a:xfrm>
             <a:prstGeom prst="rect">
@@ -5430,7 +5430,7 @@
           </p:nvSpPr>
           <p:spPr>
             <a:xfrm>
-              <a:off x="7449476" y="6038063"/>
+              <a:off x="7449094" y="6042818"/>
               <a:ext cx="64830" cy="79095"/>
             </a:xfrm>
             <a:prstGeom prst="rect">
@@ -5476,7 +5476,7 @@
           </p:nvSpPr>
           <p:spPr>
             <a:xfrm>
-              <a:off x="4740132" y="6178837"/>
+              <a:off x="4738806" y="6181489"/>
               <a:ext cx="148498" cy="98938"/>
             </a:xfrm>
             <a:prstGeom prst="rect">
@@ -5522,7 +5522,7 @@
           </p:nvSpPr>
           <p:spPr>
             <a:xfrm rot="-5400000">
-              <a:off x="607457" y="3658916"/>
+              <a:off x="607457" y="3661294"/>
               <a:ext cx="300380" cy="98938"/>
             </a:xfrm>
             <a:prstGeom prst="rect">

--- a/tests/testthat/temp_fullslide_43.pptx
+++ b/tests/testthat/temp_fullslide_43.pptx
@@ -2610,8 +2610,8 @@
           </p:nvSpPr>
           <p:spPr>
             <a:xfrm>
-              <a:off x="1065110" y="1441338"/>
-              <a:ext cx="7495890" cy="4538850"/>
+              <a:off x="1063647" y="1441338"/>
+              <a:ext cx="7497353" cy="4541593"/>
             </a:xfrm>
             <a:prstGeom prst="rect">
               <a:avLst/>
@@ -2636,21 +2636,21 @@
           </p:nvSpPr>
           <p:spPr>
             <a:xfrm>
-              <a:off x="1065110" y="5405150"/>
-              <a:ext cx="7495890" cy="0"/>
+              <a:off x="1063647" y="5407546"/>
+              <a:ext cx="7497353" cy="0"/>
             </a:xfrm>
             <a:custGeom>
               <a:avLst/>
               <a:pathLst>
-                <a:path w="7495890" h="0">
+                <a:path w="7497353" h="0">
                   <a:moveTo>
                     <a:pt x="0" y="0"/>
                   </a:moveTo>
                   <a:lnTo>
-                    <a:pt x="7495890" y="0"/>
+                    <a:pt x="7497353" y="0"/>
                   </a:lnTo>
                   <a:lnTo>
-                    <a:pt x="7495890" y="0"/>
+                    <a:pt x="7497353" y="0"/>
                   </a:lnTo>
                 </a:path>
               </a:pathLst>
@@ -2679,21 +2679,21 @@
           </p:nvSpPr>
           <p:spPr>
             <a:xfrm>
-              <a:off x="1065110" y="4527229"/>
-              <a:ext cx="7495890" cy="0"/>
+              <a:off x="1063647" y="4529094"/>
+              <a:ext cx="7497353" cy="0"/>
             </a:xfrm>
             <a:custGeom>
               <a:avLst/>
               <a:pathLst>
-                <a:path w="7495890" h="0">
+                <a:path w="7497353" h="0">
                   <a:moveTo>
                     <a:pt x="0" y="0"/>
                   </a:moveTo>
                   <a:lnTo>
-                    <a:pt x="7495890" y="0"/>
+                    <a:pt x="7497353" y="0"/>
                   </a:lnTo>
                   <a:lnTo>
-                    <a:pt x="7495890" y="0"/>
+                    <a:pt x="7497353" y="0"/>
                   </a:lnTo>
                 </a:path>
               </a:pathLst>
@@ -2722,21 +2722,21 @@
           </p:nvSpPr>
           <p:spPr>
             <a:xfrm>
-              <a:off x="1065110" y="3649308"/>
-              <a:ext cx="7495890" cy="0"/>
+              <a:off x="1063647" y="3650643"/>
+              <a:ext cx="7497353" cy="0"/>
             </a:xfrm>
             <a:custGeom>
               <a:avLst/>
               <a:pathLst>
-                <a:path w="7495890" h="0">
+                <a:path w="7497353" h="0">
                   <a:moveTo>
                     <a:pt x="0" y="0"/>
                   </a:moveTo>
                   <a:lnTo>
-                    <a:pt x="7495890" y="0"/>
+                    <a:pt x="7497353" y="0"/>
                   </a:lnTo>
                   <a:lnTo>
-                    <a:pt x="7495890" y="0"/>
+                    <a:pt x="7497353" y="0"/>
                   </a:lnTo>
                 </a:path>
               </a:pathLst>
@@ -2765,21 +2765,21 @@
           </p:nvSpPr>
           <p:spPr>
             <a:xfrm>
-              <a:off x="1065110" y="2771388"/>
-              <a:ext cx="7495890" cy="0"/>
+              <a:off x="1063647" y="2772191"/>
+              <a:ext cx="7497353" cy="0"/>
             </a:xfrm>
             <a:custGeom>
               <a:avLst/>
               <a:pathLst>
-                <a:path w="7495890" h="0">
+                <a:path w="7497353" h="0">
                   <a:moveTo>
                     <a:pt x="0" y="0"/>
                   </a:moveTo>
                   <a:lnTo>
-                    <a:pt x="7495890" y="0"/>
+                    <a:pt x="7497353" y="0"/>
                   </a:lnTo>
                   <a:lnTo>
-                    <a:pt x="7495890" y="0"/>
+                    <a:pt x="7497353" y="0"/>
                   </a:lnTo>
                 </a:path>
               </a:pathLst>
@@ -2808,21 +2808,21 @@
           </p:nvSpPr>
           <p:spPr>
             <a:xfrm>
-              <a:off x="1065110" y="1893467"/>
-              <a:ext cx="7495890" cy="0"/>
+              <a:off x="1063647" y="1893740"/>
+              <a:ext cx="7497353" cy="0"/>
             </a:xfrm>
             <a:custGeom>
               <a:avLst/>
               <a:pathLst>
-                <a:path w="7495890" h="0">
+                <a:path w="7497353" h="0">
                   <a:moveTo>
                     <a:pt x="0" y="0"/>
                   </a:moveTo>
                   <a:lnTo>
-                    <a:pt x="7495890" y="0"/>
+                    <a:pt x="7497353" y="0"/>
                   </a:lnTo>
                   <a:lnTo>
-                    <a:pt x="7495890" y="0"/>
+                    <a:pt x="7497353" y="0"/>
                   </a:lnTo>
                 </a:path>
               </a:pathLst>
@@ -2851,15 +2851,15 @@
           </p:nvSpPr>
           <p:spPr>
             <a:xfrm>
-              <a:off x="1383181" y="1441338"/>
-              <a:ext cx="0" cy="4538850"/>
+              <a:off x="1381780" y="1441338"/>
+              <a:ext cx="0" cy="4541593"/>
             </a:xfrm>
             <a:custGeom>
               <a:avLst/>
               <a:pathLst>
-                <a:path w="0" h="4538850">
+                <a:path w="0" h="4541593">
                   <a:moveTo>
-                    <a:pt x="0" y="4538850"/>
+                    <a:pt x="0" y="4541593"/>
                   </a:moveTo>
                   <a:lnTo>
                     <a:pt x="0" y="0"/>
@@ -2894,15 +2894,15 @@
           </p:nvSpPr>
           <p:spPr>
             <a:xfrm>
-              <a:off x="3125561" y="1441338"/>
-              <a:ext cx="0" cy="4538850"/>
+              <a:off x="3124500" y="1441338"/>
+              <a:ext cx="0" cy="4541593"/>
             </a:xfrm>
             <a:custGeom>
               <a:avLst/>
               <a:pathLst>
-                <a:path w="0" h="4538850">
+                <a:path w="0" h="4541593">
                   <a:moveTo>
-                    <a:pt x="0" y="4538850"/>
+                    <a:pt x="0" y="4541593"/>
                   </a:moveTo>
                   <a:lnTo>
                     <a:pt x="0" y="0"/>
@@ -2937,15 +2937,15 @@
           </p:nvSpPr>
           <p:spPr>
             <a:xfrm>
-              <a:off x="4867940" y="1441338"/>
-              <a:ext cx="0" cy="4538850"/>
+              <a:off x="4867219" y="1441338"/>
+              <a:ext cx="0" cy="4541593"/>
             </a:xfrm>
             <a:custGeom>
               <a:avLst/>
               <a:pathLst>
-                <a:path w="0" h="4538850">
+                <a:path w="0" h="4541593">
                   <a:moveTo>
-                    <a:pt x="0" y="4538850"/>
+                    <a:pt x="0" y="4541593"/>
                   </a:moveTo>
                   <a:lnTo>
                     <a:pt x="0" y="0"/>
@@ -2980,15 +2980,15 @@
           </p:nvSpPr>
           <p:spPr>
             <a:xfrm>
-              <a:off x="6610320" y="1441338"/>
-              <a:ext cx="0" cy="4538850"/>
+              <a:off x="6609939" y="1441338"/>
+              <a:ext cx="0" cy="4541593"/>
             </a:xfrm>
             <a:custGeom>
               <a:avLst/>
               <a:pathLst>
-                <a:path w="0" h="4538850">
+                <a:path w="0" h="4541593">
                   <a:moveTo>
-                    <a:pt x="0" y="4538850"/>
+                    <a:pt x="0" y="4541593"/>
                   </a:moveTo>
                   <a:lnTo>
                     <a:pt x="0" y="0"/>
@@ -3023,15 +3023,15 @@
           </p:nvSpPr>
           <p:spPr>
             <a:xfrm>
-              <a:off x="8352699" y="1441338"/>
-              <a:ext cx="0" cy="4538850"/>
+              <a:off x="8352658" y="1441338"/>
+              <a:ext cx="0" cy="4541593"/>
             </a:xfrm>
             <a:custGeom>
               <a:avLst/>
               <a:pathLst>
-                <a:path w="0" h="4538850">
+                <a:path w="0" h="4541593">
                   <a:moveTo>
-                    <a:pt x="0" y="4538850"/>
+                    <a:pt x="0" y="4541593"/>
                   </a:moveTo>
                   <a:lnTo>
                     <a:pt x="0" y="0"/>
@@ -3066,21 +3066,21 @@
           </p:nvSpPr>
           <p:spPr>
             <a:xfrm>
-              <a:off x="1065110" y="5844110"/>
-              <a:ext cx="7495890" cy="0"/>
+              <a:off x="1063647" y="5846771"/>
+              <a:ext cx="7497353" cy="0"/>
             </a:xfrm>
             <a:custGeom>
               <a:avLst/>
               <a:pathLst>
-                <a:path w="7495890" h="0">
+                <a:path w="7497353" h="0">
                   <a:moveTo>
                     <a:pt x="0" y="0"/>
                   </a:moveTo>
                   <a:lnTo>
-                    <a:pt x="7495890" y="0"/>
+                    <a:pt x="7497353" y="0"/>
                   </a:lnTo>
                   <a:lnTo>
-                    <a:pt x="7495890" y="0"/>
+                    <a:pt x="7497353" y="0"/>
                   </a:lnTo>
                 </a:path>
               </a:pathLst>
@@ -3109,21 +3109,21 @@
           </p:nvSpPr>
           <p:spPr>
             <a:xfrm>
-              <a:off x="1065110" y="4966190"/>
-              <a:ext cx="7495890" cy="0"/>
+              <a:off x="1063647" y="4968320"/>
+              <a:ext cx="7497353" cy="0"/>
             </a:xfrm>
             <a:custGeom>
               <a:avLst/>
               <a:pathLst>
-                <a:path w="7495890" h="0">
+                <a:path w="7497353" h="0">
                   <a:moveTo>
                     <a:pt x="0" y="0"/>
                   </a:moveTo>
                   <a:lnTo>
-                    <a:pt x="7495890" y="0"/>
+                    <a:pt x="7497353" y="0"/>
                   </a:lnTo>
                   <a:lnTo>
-                    <a:pt x="7495890" y="0"/>
+                    <a:pt x="7497353" y="0"/>
                   </a:lnTo>
                 </a:path>
               </a:pathLst>
@@ -3152,21 +3152,21 @@
           </p:nvSpPr>
           <p:spPr>
             <a:xfrm>
-              <a:off x="1065110" y="4088269"/>
-              <a:ext cx="7495890" cy="0"/>
+              <a:off x="1063647" y="4089869"/>
+              <a:ext cx="7497353" cy="0"/>
             </a:xfrm>
             <a:custGeom>
               <a:avLst/>
               <a:pathLst>
-                <a:path w="7495890" h="0">
+                <a:path w="7497353" h="0">
                   <a:moveTo>
                     <a:pt x="0" y="0"/>
                   </a:moveTo>
                   <a:lnTo>
-                    <a:pt x="7495890" y="0"/>
+                    <a:pt x="7497353" y="0"/>
                   </a:lnTo>
                   <a:lnTo>
-                    <a:pt x="7495890" y="0"/>
+                    <a:pt x="7497353" y="0"/>
                   </a:lnTo>
                 </a:path>
               </a:pathLst>
@@ -3195,21 +3195,21 @@
           </p:nvSpPr>
           <p:spPr>
             <a:xfrm>
-              <a:off x="1065110" y="3210348"/>
-              <a:ext cx="7495890" cy="0"/>
+              <a:off x="1063647" y="3211417"/>
+              <a:ext cx="7497353" cy="0"/>
             </a:xfrm>
             <a:custGeom>
               <a:avLst/>
               <a:pathLst>
-                <a:path w="7495890" h="0">
+                <a:path w="7497353" h="0">
                   <a:moveTo>
                     <a:pt x="0" y="0"/>
                   </a:moveTo>
                   <a:lnTo>
-                    <a:pt x="7495890" y="0"/>
+                    <a:pt x="7497353" y="0"/>
                   </a:lnTo>
                   <a:lnTo>
-                    <a:pt x="7495890" y="0"/>
+                    <a:pt x="7497353" y="0"/>
                   </a:lnTo>
                 </a:path>
               </a:pathLst>
@@ -3238,21 +3238,21 @@
           </p:nvSpPr>
           <p:spPr>
             <a:xfrm>
-              <a:off x="1065110" y="2332427"/>
-              <a:ext cx="7495890" cy="0"/>
+              <a:off x="1063647" y="2332966"/>
+              <a:ext cx="7497353" cy="0"/>
             </a:xfrm>
             <a:custGeom>
               <a:avLst/>
               <a:pathLst>
-                <a:path w="7495890" h="0">
+                <a:path w="7497353" h="0">
                   <a:moveTo>
                     <a:pt x="0" y="0"/>
                   </a:moveTo>
                   <a:lnTo>
-                    <a:pt x="7495890" y="0"/>
+                    <a:pt x="7497353" y="0"/>
                   </a:lnTo>
                   <a:lnTo>
-                    <a:pt x="7495890" y="0"/>
+                    <a:pt x="7497353" y="0"/>
                   </a:lnTo>
                 </a:path>
               </a:pathLst>
@@ -3281,21 +3281,21 @@
           </p:nvSpPr>
           <p:spPr>
             <a:xfrm>
-              <a:off x="1065110" y="1454506"/>
-              <a:ext cx="7495890" cy="0"/>
+              <a:off x="1063647" y="1454514"/>
+              <a:ext cx="7497353" cy="0"/>
             </a:xfrm>
             <a:custGeom>
               <a:avLst/>
               <a:pathLst>
-                <a:path w="7495890" h="0">
+                <a:path w="7497353" h="0">
                   <a:moveTo>
                     <a:pt x="0" y="0"/>
                   </a:moveTo>
                   <a:lnTo>
-                    <a:pt x="7495890" y="0"/>
+                    <a:pt x="7497353" y="0"/>
                   </a:lnTo>
                   <a:lnTo>
-                    <a:pt x="7495890" y="0"/>
+                    <a:pt x="7497353" y="0"/>
                   </a:lnTo>
                 </a:path>
               </a:pathLst>
@@ -3324,15 +3324,15 @@
           </p:nvSpPr>
           <p:spPr>
             <a:xfrm>
-              <a:off x="2254371" y="1441338"/>
-              <a:ext cx="0" cy="4538850"/>
+              <a:off x="2253140" y="1441338"/>
+              <a:ext cx="0" cy="4541593"/>
             </a:xfrm>
             <a:custGeom>
               <a:avLst/>
               <a:pathLst>
-                <a:path w="0" h="4538850">
+                <a:path w="0" h="4541593">
                   <a:moveTo>
-                    <a:pt x="0" y="4538850"/>
+                    <a:pt x="0" y="4541593"/>
                   </a:moveTo>
                   <a:lnTo>
                     <a:pt x="0" y="0"/>
@@ -3367,15 +3367,15 @@
           </p:nvSpPr>
           <p:spPr>
             <a:xfrm>
-              <a:off x="3996750" y="1441338"/>
-              <a:ext cx="0" cy="4538850"/>
+              <a:off x="3995860" y="1441338"/>
+              <a:ext cx="0" cy="4541593"/>
             </a:xfrm>
             <a:custGeom>
               <a:avLst/>
               <a:pathLst>
-                <a:path w="0" h="4538850">
+                <a:path w="0" h="4541593">
                   <a:moveTo>
-                    <a:pt x="0" y="4538850"/>
+                    <a:pt x="0" y="4541593"/>
                   </a:moveTo>
                   <a:lnTo>
                     <a:pt x="0" y="0"/>
@@ -3410,15 +3410,15 @@
           </p:nvSpPr>
           <p:spPr>
             <a:xfrm>
-              <a:off x="5739130" y="1441338"/>
-              <a:ext cx="0" cy="4538850"/>
+              <a:off x="5738579" y="1441338"/>
+              <a:ext cx="0" cy="4541593"/>
             </a:xfrm>
             <a:custGeom>
               <a:avLst/>
               <a:pathLst>
-                <a:path w="0" h="4538850">
+                <a:path w="0" h="4541593">
                   <a:moveTo>
-                    <a:pt x="0" y="4538850"/>
+                    <a:pt x="0" y="4541593"/>
                   </a:moveTo>
                   <a:lnTo>
                     <a:pt x="0" y="0"/>
@@ -3453,15 +3453,15 @@
           </p:nvSpPr>
           <p:spPr>
             <a:xfrm>
-              <a:off x="7481509" y="1441338"/>
-              <a:ext cx="0" cy="4538850"/>
+              <a:off x="7481299" y="1441338"/>
+              <a:ext cx="0" cy="4541593"/>
             </a:xfrm>
             <a:custGeom>
               <a:avLst/>
               <a:pathLst>
-                <a:path w="0" h="4538850">
+                <a:path w="0" h="4541593">
                   <a:moveTo>
-                    <a:pt x="0" y="4538850"/>
+                    <a:pt x="0" y="4541593"/>
                   </a:moveTo>
                   <a:lnTo>
                     <a:pt x="0" y="0"/>
@@ -3496,7 +3496,7 @@
           </p:nvSpPr>
           <p:spPr>
             <a:xfrm>
-              <a:off x="3301571" y="3879610"/>
+              <a:off x="3300551" y="3881103"/>
               <a:ext cx="66150" cy="66150"/>
             </a:xfrm>
             <a:prstGeom prst="ellipse">
@@ -3531,7 +3531,7 @@
           </p:nvSpPr>
           <p:spPr>
             <a:xfrm>
-              <a:off x="3745878" y="3879610"/>
+              <a:off x="3744945" y="3881103"/>
               <a:ext cx="66150" cy="66150"/>
             </a:xfrm>
             <a:prstGeom prst="ellipse">
@@ -3566,7 +3566,7 @@
           </p:nvSpPr>
           <p:spPr>
             <a:xfrm>
-              <a:off x="2778857" y="3563558"/>
+              <a:off x="2777735" y="3564861"/>
               <a:ext cx="66150" cy="66150"/>
             </a:xfrm>
             <a:prstGeom prst="ellipse">
@@ -3601,7 +3601,7 @@
           </p:nvSpPr>
           <p:spPr>
             <a:xfrm>
-              <a:off x="4338287" y="3809376"/>
+              <a:off x="4337469" y="3810827"/>
               <a:ext cx="66150" cy="66150"/>
             </a:xfrm>
             <a:prstGeom prst="ellipse">
@@ -3636,7 +3636,7 @@
           </p:nvSpPr>
           <p:spPr>
             <a:xfrm>
-              <a:off x="4730322" y="4283453"/>
+              <a:off x="4729581" y="4285191"/>
               <a:ext cx="66150" cy="66150"/>
             </a:xfrm>
             <a:prstGeom prst="ellipse">
@@ -3671,7 +3671,7 @@
           </p:nvSpPr>
           <p:spPr>
             <a:xfrm>
-              <a:off x="4765170" y="4388804"/>
+              <a:off x="4764436" y="4390605"/>
               <a:ext cx="66150" cy="66150"/>
             </a:xfrm>
             <a:prstGeom prst="ellipse">
@@ -3706,7 +3706,7 @@
           </p:nvSpPr>
           <p:spPr>
             <a:xfrm>
-              <a:off x="4956832" y="5056024"/>
+              <a:off x="4956135" y="5058228"/>
               <a:ext cx="66150" cy="66150"/>
             </a:xfrm>
             <a:prstGeom prst="ellipse">
@@ -3741,7 +3741,7 @@
           </p:nvSpPr>
           <p:spPr>
             <a:xfrm>
-              <a:off x="4294728" y="3282623"/>
+              <a:off x="4293901" y="3283756"/>
               <a:ext cx="66150" cy="66150"/>
             </a:xfrm>
             <a:prstGeom prst="ellipse">
@@ -3776,7 +3776,7 @@
           </p:nvSpPr>
           <p:spPr>
             <a:xfrm>
-              <a:off x="4225032" y="3563558"/>
+              <a:off x="4224193" y="3564861"/>
               <a:ext cx="66150" cy="66150"/>
             </a:xfrm>
             <a:prstGeom prst="ellipse">
@@ -3811,7 +3811,7 @@
           </p:nvSpPr>
           <p:spPr>
             <a:xfrm>
-              <a:off x="4730322" y="4195661"/>
+              <a:off x="4729581" y="4197346"/>
               <a:ext cx="66150" cy="66150"/>
             </a:xfrm>
             <a:prstGeom prst="ellipse">
@@ -3846,7 +3846,7 @@
           </p:nvSpPr>
           <p:spPr>
             <a:xfrm>
-              <a:off x="4730322" y="4441479"/>
+              <a:off x="4729581" y="4443312"/>
               <a:ext cx="66150" cy="66150"/>
             </a:xfrm>
             <a:prstGeom prst="ellipse">
@@ -3881,7 +3881,7 @@
           </p:nvSpPr>
           <p:spPr>
             <a:xfrm>
-              <a:off x="5828021" y="4687297"/>
+              <a:off x="5827494" y="4689279"/>
               <a:ext cx="66150" cy="66150"/>
             </a:xfrm>
             <a:prstGeom prst="ellipse">
@@ -3916,7 +3916,7 @@
           </p:nvSpPr>
           <p:spPr>
             <a:xfrm>
-              <a:off x="5235612" y="4529271"/>
+              <a:off x="5234970" y="4531157"/>
               <a:ext cx="66150" cy="66150"/>
             </a:xfrm>
             <a:prstGeom prst="ellipse">
@@ -3951,7 +3951,7 @@
           </p:nvSpPr>
           <p:spPr>
             <a:xfrm>
-              <a:off x="5322731" y="4897998"/>
+              <a:off x="5322106" y="4900107"/>
               <a:ext cx="66150" cy="66150"/>
             </a:xfrm>
             <a:prstGeom prst="ellipse">
@@ -3986,7 +3986,7 @@
           </p:nvSpPr>
           <p:spPr>
             <a:xfrm>
-              <a:off x="7884029" y="5740802"/>
+              <a:off x="7883903" y="5743420"/>
               <a:ext cx="66150" cy="66150"/>
             </a:xfrm>
             <a:prstGeom prst="ellipse">
@@ -4021,7 +4021,7 @@
           </p:nvSpPr>
           <p:spPr>
             <a:xfrm>
-              <a:off x="8187203" y="5740802"/>
+              <a:off x="8187137" y="5743420"/>
               <a:ext cx="66150" cy="66150"/>
             </a:xfrm>
             <a:prstGeom prst="ellipse">
@@ -4056,7 +4056,7 @@
           </p:nvSpPr>
           <p:spPr>
             <a:xfrm>
-              <a:off x="8049555" y="4985790"/>
+              <a:off x="8049462" y="4987952"/>
               <a:ext cx="66150" cy="66150"/>
             </a:xfrm>
             <a:prstGeom prst="ellipse">
@@ -4091,7 +4091,7 @@
           </p:nvSpPr>
           <p:spPr>
             <a:xfrm>
-              <a:off x="2569772" y="1877950"/>
+              <a:off x="2568609" y="1878234"/>
               <a:ext cx="66150" cy="66150"/>
             </a:xfrm>
             <a:prstGeom prst="ellipse">
@@ -4126,7 +4126,7 @@
           </p:nvSpPr>
           <p:spPr>
             <a:xfrm>
-              <a:off x="1550480" y="2229119"/>
+              <a:off x="1549118" y="2229615"/>
               <a:ext cx="66150" cy="66150"/>
             </a:xfrm>
             <a:prstGeom prst="ellipse">
@@ -4161,7 +4161,7 @@
           </p:nvSpPr>
           <p:spPr>
             <a:xfrm>
-              <a:off x="1933803" y="1614574"/>
+              <a:off x="1932516" y="1614699"/>
               <a:ext cx="66150" cy="66150"/>
             </a:xfrm>
             <a:prstGeom prst="ellipse">
@@ -4196,7 +4196,7 @@
           </p:nvSpPr>
           <p:spPr>
             <a:xfrm>
-              <a:off x="3031502" y="3791818"/>
+              <a:off x="3030430" y="3793258"/>
               <a:ext cx="66150" cy="66150"/>
             </a:xfrm>
             <a:prstGeom prst="ellipse">
@@ -4231,7 +4231,7 @@
           </p:nvSpPr>
           <p:spPr>
             <a:xfrm>
-              <a:off x="4869713" y="4845323"/>
+              <a:off x="4868999" y="4847400"/>
               <a:ext cx="66150" cy="66150"/>
             </a:xfrm>
             <a:prstGeom prst="ellipse">
@@ -4266,7 +4266,7 @@
           </p:nvSpPr>
           <p:spPr>
             <a:xfrm>
-              <a:off x="4721610" y="4897998"/>
+              <a:off x="4720868" y="4900107"/>
               <a:ext cx="66150" cy="66150"/>
             </a:xfrm>
             <a:prstGeom prst="ellipse">
@@ -4301,7 +4301,7 @@
           </p:nvSpPr>
           <p:spPr>
             <a:xfrm>
-              <a:off x="5427274" y="5231608"/>
+              <a:off x="5426669" y="5233918"/>
               <a:ext cx="66150" cy="66150"/>
             </a:xfrm>
             <a:prstGeom prst="ellipse">
@@ -4336,7 +4336,7 @@
           </p:nvSpPr>
           <p:spPr>
             <a:xfrm>
-              <a:off x="5435986" y="4195661"/>
+              <a:off x="5435383" y="4197346"/>
               <a:ext cx="66150" cy="66150"/>
             </a:xfrm>
             <a:prstGeom prst="ellipse">
@@ -4371,7 +4371,7 @@
           </p:nvSpPr>
           <p:spPr>
             <a:xfrm>
-              <a:off x="2108041" y="2773429"/>
+              <a:off x="2106788" y="2774254"/>
               <a:ext cx="66150" cy="66150"/>
             </a:xfrm>
             <a:prstGeom prst="ellipse">
@@ -4406,7 +4406,7 @@
           </p:nvSpPr>
           <p:spPr>
             <a:xfrm>
-              <a:off x="2465229" y="3001689"/>
+              <a:off x="2464046" y="3002652"/>
               <a:ext cx="66150" cy="66150"/>
             </a:xfrm>
             <a:prstGeom prst="ellipse">
@@ -4441,7 +4441,7 @@
           </p:nvSpPr>
           <p:spPr>
             <a:xfrm>
-              <a:off x="1372757" y="2229119"/>
+              <a:off x="1371361" y="2229615"/>
               <a:ext cx="66150" cy="66150"/>
             </a:xfrm>
             <a:prstGeom prst="ellipse">
@@ -4476,7 +4476,7 @@
           </p:nvSpPr>
           <p:spPr>
             <a:xfrm>
-              <a:off x="4259880" y="4792647"/>
+              <a:off x="4259047" y="4794693"/>
               <a:ext cx="66150" cy="66150"/>
             </a:xfrm>
             <a:prstGeom prst="ellipse">
@@ -4511,7 +4511,7 @@
           </p:nvSpPr>
           <p:spPr>
             <a:xfrm>
-              <a:off x="3562928" y="4107869"/>
+              <a:off x="3561959" y="4109501"/>
               <a:ext cx="66150" cy="66150"/>
             </a:xfrm>
             <a:prstGeom prst="ellipse">
@@ -4546,7 +4546,7 @@
           </p:nvSpPr>
           <p:spPr>
             <a:xfrm>
-              <a:off x="4956832" y="4933115"/>
+              <a:off x="4956135" y="4935245"/>
               <a:ext cx="66150" cy="66150"/>
             </a:xfrm>
             <a:prstGeom prst="ellipse">
@@ -4581,7 +4581,7 @@
           </p:nvSpPr>
           <p:spPr>
             <a:xfrm>
-              <a:off x="3580352" y="3809376"/>
+              <a:off x="3579386" y="3810827"/>
               <a:ext cx="66150" cy="66150"/>
             </a:xfrm>
             <a:prstGeom prst="ellipse">
@@ -4616,7 +4616,7 @@
           </p:nvSpPr>
           <p:spPr>
             <a:xfrm>
-              <a:off x="872818" y="5804563"/>
+              <a:off x="871355" y="5807224"/>
               <a:ext cx="129661" cy="79095"/>
             </a:xfrm>
             <a:prstGeom prst="rect">
@@ -4629,9 +4629,6 @@
             <a:lstStyle/>
             <a:p>
               <a:pPr algn="l" marL="0" marR="0" indent="0">
-                <a:lnSpc>
-                  <a:spcPts val="880"/>
-                </a:lnSpc>
                 <a:spcBef>
                   <a:spcPts val="0"/>
                 </a:spcBef>
@@ -4640,7 +4637,7 @@
                 </a:spcAft>
               </a:pPr>
               <a:r>
-                <a:rPr sz="880">
+                <a:rPr sz="880" i="0" b="0">
                   <a:solidFill>
                     <a:srgbClr val="4D4D4D">
                       <a:alpha val="100000"/>
@@ -4662,7 +4659,7 @@
           </p:nvSpPr>
           <p:spPr>
             <a:xfrm>
-              <a:off x="872818" y="4926642"/>
+              <a:off x="871355" y="4928772"/>
               <a:ext cx="129661" cy="79095"/>
             </a:xfrm>
             <a:prstGeom prst="rect">
@@ -4675,9 +4672,6 @@
             <a:lstStyle/>
             <a:p>
               <a:pPr algn="l" marL="0" marR="0" indent="0">
-                <a:lnSpc>
-                  <a:spcPts val="880"/>
-                </a:lnSpc>
                 <a:spcBef>
                   <a:spcPts val="0"/>
                 </a:spcBef>
@@ -4686,7 +4680,7 @@
                 </a:spcAft>
               </a:pPr>
               <a:r>
-                <a:rPr sz="880">
+                <a:rPr sz="880" i="0" b="0">
                   <a:solidFill>
                     <a:srgbClr val="4D4D4D">
                       <a:alpha val="100000"/>
@@ -4708,7 +4702,7 @@
           </p:nvSpPr>
           <p:spPr>
             <a:xfrm>
-              <a:off x="872818" y="4048721"/>
+              <a:off x="871355" y="4050321"/>
               <a:ext cx="129661" cy="79095"/>
             </a:xfrm>
             <a:prstGeom prst="rect">
@@ -4721,9 +4715,6 @@
             <a:lstStyle/>
             <a:p>
               <a:pPr algn="l" marL="0" marR="0" indent="0">
-                <a:lnSpc>
-                  <a:spcPts val="880"/>
-                </a:lnSpc>
                 <a:spcBef>
                   <a:spcPts val="0"/>
                 </a:spcBef>
@@ -4732,7 +4723,7 @@
                 </a:spcAft>
               </a:pPr>
               <a:r>
-                <a:rPr sz="880">
+                <a:rPr sz="880" i="0" b="0">
                   <a:solidFill>
                     <a:srgbClr val="4D4D4D">
                       <a:alpha val="100000"/>
@@ -4754,7 +4745,7 @@
           </p:nvSpPr>
           <p:spPr>
             <a:xfrm>
-              <a:off x="872818" y="3170800"/>
+              <a:off x="871355" y="3171869"/>
               <a:ext cx="129661" cy="79095"/>
             </a:xfrm>
             <a:prstGeom prst="rect">
@@ -4767,9 +4758,6 @@
             <a:lstStyle/>
             <a:p>
               <a:pPr algn="l" marL="0" marR="0" indent="0">
-                <a:lnSpc>
-                  <a:spcPts val="880"/>
-                </a:lnSpc>
                 <a:spcBef>
                   <a:spcPts val="0"/>
                 </a:spcBef>
@@ -4778,7 +4766,7 @@
                 </a:spcAft>
               </a:pPr>
               <a:r>
-                <a:rPr sz="880">
+                <a:rPr sz="880" i="0" b="0">
                   <a:solidFill>
                     <a:srgbClr val="4D4D4D">
                       <a:alpha val="100000"/>
@@ -4800,7 +4788,7 @@
           </p:nvSpPr>
           <p:spPr>
             <a:xfrm>
-              <a:off x="872818" y="2292879"/>
+              <a:off x="871355" y="2293418"/>
               <a:ext cx="129661" cy="79095"/>
             </a:xfrm>
             <a:prstGeom prst="rect">
@@ -4813,9 +4801,6 @@
             <a:lstStyle/>
             <a:p>
               <a:pPr algn="l" marL="0" marR="0" indent="0">
-                <a:lnSpc>
-                  <a:spcPts val="880"/>
-                </a:lnSpc>
                 <a:spcBef>
                   <a:spcPts val="0"/>
                 </a:spcBef>
@@ -4824,7 +4809,7 @@
                 </a:spcAft>
               </a:pPr>
               <a:r>
-                <a:rPr sz="880">
+                <a:rPr sz="880" i="0" b="0">
                   <a:solidFill>
                     <a:srgbClr val="4D4D4D">
                       <a:alpha val="100000"/>
@@ -4846,7 +4831,7 @@
           </p:nvSpPr>
           <p:spPr>
             <a:xfrm>
-              <a:off x="872818" y="1414959"/>
+              <a:off x="871355" y="1414967"/>
               <a:ext cx="129661" cy="79095"/>
             </a:xfrm>
             <a:prstGeom prst="rect">
@@ -4859,9 +4844,6 @@
             <a:lstStyle/>
             <a:p>
               <a:pPr algn="l" marL="0" marR="0" indent="0">
-                <a:lnSpc>
-                  <a:spcPts val="880"/>
-                </a:lnSpc>
                 <a:spcBef>
                   <a:spcPts val="0"/>
                 </a:spcBef>
@@ -4870,7 +4852,7 @@
                 </a:spcAft>
               </a:pPr>
               <a:r>
-                <a:rPr sz="880">
+                <a:rPr sz="880" i="0" b="0">
                   <a:solidFill>
                     <a:srgbClr val="4D4D4D">
                       <a:alpha val="100000"/>
@@ -4892,7 +4874,7 @@
           </p:nvSpPr>
           <p:spPr>
             <a:xfrm>
-              <a:off x="1030315" y="5844110"/>
+              <a:off x="1028852" y="5846771"/>
               <a:ext cx="34794" cy="0"/>
             </a:xfrm>
             <a:custGeom>
@@ -4932,7 +4914,7 @@
           </p:nvSpPr>
           <p:spPr>
             <a:xfrm>
-              <a:off x="1030315" y="4966190"/>
+              <a:off x="1028852" y="4968320"/>
               <a:ext cx="34794" cy="0"/>
             </a:xfrm>
             <a:custGeom>
@@ -4972,7 +4954,7 @@
           </p:nvSpPr>
           <p:spPr>
             <a:xfrm>
-              <a:off x="1030315" y="4088269"/>
+              <a:off x="1028852" y="4089869"/>
               <a:ext cx="34794" cy="0"/>
             </a:xfrm>
             <a:custGeom>
@@ -5012,7 +4994,7 @@
           </p:nvSpPr>
           <p:spPr>
             <a:xfrm>
-              <a:off x="1030315" y="3210348"/>
+              <a:off x="1028852" y="3211417"/>
               <a:ext cx="34794" cy="0"/>
             </a:xfrm>
             <a:custGeom>
@@ -5052,7 +5034,7 @@
           </p:nvSpPr>
           <p:spPr>
             <a:xfrm>
-              <a:off x="1030315" y="2332427"/>
+              <a:off x="1028852" y="2332966"/>
               <a:ext cx="34794" cy="0"/>
             </a:xfrm>
             <a:custGeom>
@@ -5092,7 +5074,7 @@
           </p:nvSpPr>
           <p:spPr>
             <a:xfrm>
-              <a:off x="1030315" y="1454506"/>
+              <a:off x="1028852" y="1454514"/>
               <a:ext cx="34794" cy="0"/>
             </a:xfrm>
             <a:custGeom>
@@ -5132,7 +5114,7 @@
           </p:nvSpPr>
           <p:spPr>
             <a:xfrm>
-              <a:off x="2254371" y="5980188"/>
+              <a:off x="2253140" y="5982931"/>
               <a:ext cx="0" cy="34794"/>
             </a:xfrm>
             <a:custGeom>
@@ -5172,7 +5154,7 @@
           </p:nvSpPr>
           <p:spPr>
             <a:xfrm>
-              <a:off x="3996750" y="5980188"/>
+              <a:off x="3995860" y="5982931"/>
               <a:ext cx="0" cy="34794"/>
             </a:xfrm>
             <a:custGeom>
@@ -5212,7 +5194,7 @@
           </p:nvSpPr>
           <p:spPr>
             <a:xfrm>
-              <a:off x="5739130" y="5980188"/>
+              <a:off x="5738579" y="5982931"/>
               <a:ext cx="0" cy="34794"/>
             </a:xfrm>
             <a:custGeom>
@@ -5252,7 +5234,7 @@
           </p:nvSpPr>
           <p:spPr>
             <a:xfrm>
-              <a:off x="7481509" y="5980188"/>
+              <a:off x="7481299" y="5982931"/>
               <a:ext cx="0" cy="34794"/>
             </a:xfrm>
             <a:custGeom>
@@ -5292,7 +5274,7 @@
           </p:nvSpPr>
           <p:spPr>
             <a:xfrm>
-              <a:off x="2221956" y="6042818"/>
+              <a:off x="2220725" y="6045561"/>
               <a:ext cx="64830" cy="79095"/>
             </a:xfrm>
             <a:prstGeom prst="rect">
@@ -5305,9 +5287,6 @@
             <a:lstStyle/>
             <a:p>
               <a:pPr algn="l" marL="0" marR="0" indent="0">
-                <a:lnSpc>
-                  <a:spcPts val="880"/>
-                </a:lnSpc>
                 <a:spcBef>
                   <a:spcPts val="0"/>
                 </a:spcBef>
@@ -5316,7 +5295,7 @@
                 </a:spcAft>
               </a:pPr>
               <a:r>
-                <a:rPr sz="880">
+                <a:rPr sz="880" i="0" b="0">
                   <a:solidFill>
                     <a:srgbClr val="4D4D4D">
                       <a:alpha val="100000"/>
@@ -5338,7 +5317,7 @@
           </p:nvSpPr>
           <p:spPr>
             <a:xfrm>
-              <a:off x="3964335" y="6042818"/>
+              <a:off x="3963444" y="6045561"/>
               <a:ext cx="64830" cy="79095"/>
             </a:xfrm>
             <a:prstGeom prst="rect">
@@ -5351,9 +5330,6 @@
             <a:lstStyle/>
             <a:p>
               <a:pPr algn="l" marL="0" marR="0" indent="0">
-                <a:lnSpc>
-                  <a:spcPts val="880"/>
-                </a:lnSpc>
                 <a:spcBef>
                   <a:spcPts val="0"/>
                 </a:spcBef>
@@ -5362,7 +5338,7 @@
                 </a:spcAft>
               </a:pPr>
               <a:r>
-                <a:rPr sz="880">
+                <a:rPr sz="880" i="0" b="0">
                   <a:solidFill>
                     <a:srgbClr val="4D4D4D">
                       <a:alpha val="100000"/>
@@ -5384,7 +5360,7 @@
           </p:nvSpPr>
           <p:spPr>
             <a:xfrm>
-              <a:off x="5706714" y="6042818"/>
+              <a:off x="5706164" y="6045561"/>
               <a:ext cx="64830" cy="79095"/>
             </a:xfrm>
             <a:prstGeom prst="rect">
@@ -5397,9 +5373,6 @@
             <a:lstStyle/>
             <a:p>
               <a:pPr algn="l" marL="0" marR="0" indent="0">
-                <a:lnSpc>
-                  <a:spcPts val="880"/>
-                </a:lnSpc>
                 <a:spcBef>
                   <a:spcPts val="0"/>
                 </a:spcBef>
@@ -5408,7 +5381,7 @@
                 </a:spcAft>
               </a:pPr>
               <a:r>
-                <a:rPr sz="880">
+                <a:rPr sz="880" i="0" b="0">
                   <a:solidFill>
                     <a:srgbClr val="4D4D4D">
                       <a:alpha val="100000"/>
@@ -5430,7 +5403,7 @@
           </p:nvSpPr>
           <p:spPr>
             <a:xfrm>
-              <a:off x="7449094" y="6042818"/>
+              <a:off x="7448883" y="6045561"/>
               <a:ext cx="64830" cy="79095"/>
             </a:xfrm>
             <a:prstGeom prst="rect">
@@ -5443,9 +5416,6 @@
             <a:lstStyle/>
             <a:p>
               <a:pPr algn="l" marL="0" marR="0" indent="0">
-                <a:lnSpc>
-                  <a:spcPts val="880"/>
-                </a:lnSpc>
                 <a:spcBef>
                   <a:spcPts val="0"/>
                 </a:spcBef>
@@ -5454,7 +5424,7 @@
                 </a:spcAft>
               </a:pPr>
               <a:r>
-                <a:rPr sz="880">
+                <a:rPr sz="880" i="0" b="0">
                   <a:solidFill>
                     <a:srgbClr val="4D4D4D">
                       <a:alpha val="100000"/>
@@ -5476,7 +5446,7 @@
           </p:nvSpPr>
           <p:spPr>
             <a:xfrm>
-              <a:off x="4738806" y="6181489"/>
+              <a:off x="4738074" y="6182952"/>
               <a:ext cx="148498" cy="98938"/>
             </a:xfrm>
             <a:prstGeom prst="rect">
@@ -5489,9 +5459,6 @@
             <a:lstStyle/>
             <a:p>
               <a:pPr algn="l" marL="0" marR="0" indent="0">
-                <a:lnSpc>
-                  <a:spcPts val="1100"/>
-                </a:lnSpc>
                 <a:spcBef>
                   <a:spcPts val="0"/>
                 </a:spcBef>
@@ -5500,7 +5467,7 @@
                 </a:spcAft>
               </a:pPr>
               <a:r>
-                <a:rPr sz="1100">
+                <a:rPr sz="1100" i="0" b="0">
                   <a:solidFill>
                     <a:srgbClr val="000000">
                       <a:alpha val="100000"/>
@@ -5522,7 +5489,7 @@
           </p:nvSpPr>
           <p:spPr>
             <a:xfrm rot="-5400000">
-              <a:off x="607457" y="3661294"/>
+              <a:off x="607457" y="3662665"/>
               <a:ext cx="300380" cy="98938"/>
             </a:xfrm>
             <a:prstGeom prst="rect">
@@ -5535,9 +5502,6 @@
             <a:lstStyle/>
             <a:p>
               <a:pPr algn="l" marL="0" marR="0" indent="0">
-                <a:lnSpc>
-                  <a:spcPts val="1100"/>
-                </a:lnSpc>
                 <a:spcBef>
                   <a:spcPts val="0"/>
                 </a:spcBef>
@@ -5546,7 +5510,7 @@
                 </a:spcAft>
               </a:pPr>
               <a:r>
-                <a:rPr sz="1100">
+                <a:rPr sz="1100" i="0" b="0">
                   <a:solidFill>
                     <a:srgbClr val="000000">
                       <a:alpha val="100000"/>

--- a/tests/testthat/temp_fullslide_43.pptx
+++ b/tests/testthat/temp_fullslide_43.pptx
@@ -5574,8 +5574,10 @@
           <a:p>
             <a:r>
               <a:rPr/>
-              <a:t>Notes: notes. 
-Source: source</a:t>
+              <a:t>Notes:
+notes.
+Source:
+source</a:t>
             </a:r>
           </a:p>
         </p:txBody>
